--- a/SkipQ_Project_Presentation.pptx
+++ b/SkipQ_Project_Presentation.pptx
@@ -5,21 +5,21 @@
     <p:sldMasterId id="2147483648" r:id="rId1"/>
   </p:sldMasterIdLst>
   <p:sldIdLst>
-    <p:sldId id="256" r:id="rId2"/>
-    <p:sldId id="257" r:id="rId3"/>
-    <p:sldId id="258" r:id="rId4"/>
-    <p:sldId id="259" r:id="rId5"/>
-    <p:sldId id="260" r:id="rId6"/>
-    <p:sldId id="261" r:id="rId7"/>
-    <p:sldId id="262" r:id="rId8"/>
-    <p:sldId id="263" r:id="rId9"/>
-    <p:sldId id="264" r:id="rId10"/>
-    <p:sldId id="265" r:id="rId11"/>
-    <p:sldId id="266" r:id="rId12"/>
-    <p:sldId id="267" r:id="rId13"/>
-    <p:sldId id="268" r:id="rId14"/>
+    <p:sldId id="256" r:id="rId7"/>
+    <p:sldId id="257" r:id="rId8"/>
+    <p:sldId id="258" r:id="rId9"/>
+    <p:sldId id="259" r:id="rId10"/>
+    <p:sldId id="260" r:id="rId11"/>
+    <p:sldId id="261" r:id="rId12"/>
+    <p:sldId id="262" r:id="rId13"/>
+    <p:sldId id="263" r:id="rId14"/>
+    <p:sldId id="264" r:id="rId15"/>
+    <p:sldId id="265" r:id="rId16"/>
+    <p:sldId id="266" r:id="rId17"/>
+    <p:sldId id="267" r:id="rId18"/>
+    <p:sldId id="268" r:id="rId19"/>
   </p:sldIdLst>
-  <p:sldSz cx="12192000" cy="6858000"/>
+  <p:sldSz cx="12191695" cy="6858000" type="screen4x3"/>
   <p:notesSz cx="6858000" cy="9144000"/>
   <p:defaultTextStyle>
     <a:defPPr>
@@ -116,22 +116,6 @@
       </a:defRPr>
     </a:lvl9pPr>
   </p:defaultTextStyle>
-  <p:extLst>
-    <p:ext uri="{EFAFB233-063F-42B5-8137-9DF3F51BA10A}">
-      <p15:sldGuideLst xmlns:p15="http://schemas.microsoft.com/office/powerpoint/2012/main">
-        <p15:guide id="1" orient="horz" pos="2160">
-          <p15:clr>
-            <a:srgbClr val="A4A3A4"/>
-          </p15:clr>
-        </p15:guide>
-        <p15:guide id="2" pos="2880">
-          <p15:clr>
-            <a:srgbClr val="A4A3A4"/>
-          </p15:clr>
-        </p15:guide>
-      </p15:sldGuideLst>
-    </p:ext>
-  </p:extLst>
 </p:presentation>
 </file>
 
@@ -173,9 +157,10 @@
           <a:lstStyle/>
           <a:p>
             <a:r>
-              <a:rPr lang="en-US"/>
+              <a:rPr lang="en-US" smtClean="0"/>
               <a:t>Click to edit Master title style</a:t>
             </a:r>
+            <a:endParaRPr lang="en-US"/>
           </a:p>
         </p:txBody>
       </p:sp>
@@ -291,9 +276,10 @@
           </a:lstStyle>
           <a:p>
             <a:r>
-              <a:rPr lang="en-US"/>
+              <a:rPr lang="en-US" smtClean="0"/>
               <a:t>Click to edit Master subtitle style</a:t>
             </a:r>
+            <a:endParaRPr lang="en-US"/>
           </a:p>
         </p:txBody>
       </p:sp>
@@ -314,7 +300,7 @@
           <a:p>
             <a:fld id="{5BCAD085-E8A6-8845-BD4E-CB4CCA059FC4}" type="datetimeFigureOut">
               <a:rPr lang="en-US" smtClean="0"/>
-              <a:t>8/20/2026</a:t>
+              <a:t>1/27/13</a:t>
             </a:fld>
             <a:endParaRPr lang="en-US"/>
           </a:p>
@@ -408,9 +394,10 @@
           <a:lstStyle/>
           <a:p>
             <a:r>
-              <a:rPr lang="en-US"/>
+              <a:rPr lang="en-US" smtClean="0"/>
               <a:t>Click to edit Master title style</a:t>
             </a:r>
+            <a:endParaRPr lang="en-US"/>
           </a:p>
         </p:txBody>
       </p:sp>
@@ -431,37 +418,38 @@
           <a:p>
             <a:pPr lvl="0"/>
             <a:r>
-              <a:rPr lang="en-US"/>
+              <a:rPr lang="en-US" smtClean="0"/>
               <a:t>Click to edit Master text styles</a:t>
             </a:r>
           </a:p>
           <a:p>
             <a:pPr lvl="1"/>
             <a:r>
-              <a:rPr lang="en-US"/>
+              <a:rPr lang="en-US" smtClean="0"/>
               <a:t>Second level</a:t>
             </a:r>
           </a:p>
           <a:p>
             <a:pPr lvl="2"/>
             <a:r>
-              <a:rPr lang="en-US"/>
+              <a:rPr lang="en-US" smtClean="0"/>
               <a:t>Third level</a:t>
             </a:r>
           </a:p>
           <a:p>
             <a:pPr lvl="3"/>
             <a:r>
-              <a:rPr lang="en-US"/>
+              <a:rPr lang="en-US" smtClean="0"/>
               <a:t>Fourth level</a:t>
             </a:r>
           </a:p>
           <a:p>
             <a:pPr lvl="4"/>
             <a:r>
-              <a:rPr lang="en-US"/>
+              <a:rPr lang="en-US" smtClean="0"/>
               <a:t>Fifth level</a:t>
             </a:r>
+            <a:endParaRPr lang="en-US"/>
           </a:p>
         </p:txBody>
       </p:sp>
@@ -482,7 +470,7 @@
           <a:p>
             <a:fld id="{5BCAD085-E8A6-8845-BD4E-CB4CCA059FC4}" type="datetimeFigureOut">
               <a:rPr lang="en-US" smtClean="0"/>
-              <a:t>8/20/2026</a:t>
+              <a:t>1/27/13</a:t>
             </a:fld>
             <a:endParaRPr lang="en-US"/>
           </a:p>
@@ -581,9 +569,10 @@
           <a:lstStyle/>
           <a:p>
             <a:r>
-              <a:rPr lang="en-US"/>
+              <a:rPr lang="en-US" smtClean="0"/>
               <a:t>Click to edit Master title style</a:t>
             </a:r>
+            <a:endParaRPr lang="en-US"/>
           </a:p>
         </p:txBody>
       </p:sp>
@@ -609,37 +598,38 @@
           <a:p>
             <a:pPr lvl="0"/>
             <a:r>
-              <a:rPr lang="en-US"/>
+              <a:rPr lang="en-US" smtClean="0"/>
               <a:t>Click to edit Master text styles</a:t>
             </a:r>
           </a:p>
           <a:p>
             <a:pPr lvl="1"/>
             <a:r>
-              <a:rPr lang="en-US"/>
+              <a:rPr lang="en-US" smtClean="0"/>
               <a:t>Second level</a:t>
             </a:r>
           </a:p>
           <a:p>
             <a:pPr lvl="2"/>
             <a:r>
-              <a:rPr lang="en-US"/>
+              <a:rPr lang="en-US" smtClean="0"/>
               <a:t>Third level</a:t>
             </a:r>
           </a:p>
           <a:p>
             <a:pPr lvl="3"/>
             <a:r>
-              <a:rPr lang="en-US"/>
+              <a:rPr lang="en-US" smtClean="0"/>
               <a:t>Fourth level</a:t>
             </a:r>
           </a:p>
           <a:p>
             <a:pPr lvl="4"/>
             <a:r>
-              <a:rPr lang="en-US"/>
+              <a:rPr lang="en-US" smtClean="0"/>
               <a:t>Fifth level</a:t>
             </a:r>
+            <a:endParaRPr lang="en-US"/>
           </a:p>
         </p:txBody>
       </p:sp>
@@ -660,7 +650,7 @@
           <a:p>
             <a:fld id="{5BCAD085-E8A6-8845-BD4E-CB4CCA059FC4}" type="datetimeFigureOut">
               <a:rPr lang="en-US" smtClean="0"/>
-              <a:t>8/20/2026</a:t>
+              <a:t>1/27/13</a:t>
             </a:fld>
             <a:endParaRPr lang="en-US"/>
           </a:p>
@@ -754,9 +744,10 @@
           <a:lstStyle/>
           <a:p>
             <a:r>
-              <a:rPr lang="en-US"/>
+              <a:rPr lang="en-US" smtClean="0"/>
               <a:t>Click to edit Master title style</a:t>
             </a:r>
+            <a:endParaRPr lang="en-US"/>
           </a:p>
         </p:txBody>
       </p:sp>
@@ -777,37 +768,38 @@
           <a:p>
             <a:pPr lvl="0"/>
             <a:r>
-              <a:rPr lang="en-US"/>
+              <a:rPr lang="en-US" smtClean="0"/>
               <a:t>Click to edit Master text styles</a:t>
             </a:r>
           </a:p>
           <a:p>
             <a:pPr lvl="1"/>
             <a:r>
-              <a:rPr lang="en-US"/>
+              <a:rPr lang="en-US" smtClean="0"/>
               <a:t>Second level</a:t>
             </a:r>
           </a:p>
           <a:p>
             <a:pPr lvl="2"/>
             <a:r>
-              <a:rPr lang="en-US"/>
+              <a:rPr lang="en-US" smtClean="0"/>
               <a:t>Third level</a:t>
             </a:r>
           </a:p>
           <a:p>
             <a:pPr lvl="3"/>
             <a:r>
-              <a:rPr lang="en-US"/>
+              <a:rPr lang="en-US" smtClean="0"/>
               <a:t>Fourth level</a:t>
             </a:r>
           </a:p>
           <a:p>
             <a:pPr lvl="4"/>
             <a:r>
-              <a:rPr lang="en-US"/>
+              <a:rPr lang="en-US" smtClean="0"/>
               <a:t>Fifth level</a:t>
             </a:r>
+            <a:endParaRPr lang="en-US"/>
           </a:p>
         </p:txBody>
       </p:sp>
@@ -828,7 +820,7 @@
           <a:p>
             <a:fld id="{5BCAD085-E8A6-8845-BD4E-CB4CCA059FC4}" type="datetimeFigureOut">
               <a:rPr lang="en-US" smtClean="0"/>
-              <a:t>8/20/2026</a:t>
+              <a:t>1/27/13</a:t>
             </a:fld>
             <a:endParaRPr lang="en-US"/>
           </a:p>
@@ -931,9 +923,10 @@
           </a:lstStyle>
           <a:p>
             <a:r>
-              <a:rPr lang="en-US"/>
+              <a:rPr lang="en-US" smtClean="0"/>
               <a:t>Click to edit Master title style</a:t>
             </a:r>
+            <a:endParaRPr lang="en-US"/>
           </a:p>
         </p:txBody>
       </p:sp>
@@ -1050,7 +1043,7 @@
           <a:p>
             <a:pPr lvl="0"/>
             <a:r>
-              <a:rPr lang="en-US"/>
+              <a:rPr lang="en-US" smtClean="0"/>
               <a:t>Click to edit Master text styles</a:t>
             </a:r>
           </a:p>
@@ -1073,7 +1066,7 @@
           <a:p>
             <a:fld id="{5BCAD085-E8A6-8845-BD4E-CB4CCA059FC4}" type="datetimeFigureOut">
               <a:rPr lang="en-US" smtClean="0"/>
-              <a:t>8/20/2026</a:t>
+              <a:t>1/27/13</a:t>
             </a:fld>
             <a:endParaRPr lang="en-US"/>
           </a:p>
@@ -1167,9 +1160,10 @@
           <a:lstStyle/>
           <a:p>
             <a:r>
-              <a:rPr lang="en-US"/>
+              <a:rPr lang="en-US" smtClean="0"/>
               <a:t>Click to edit Master title style</a:t>
             </a:r>
+            <a:endParaRPr lang="en-US"/>
           </a:p>
         </p:txBody>
       </p:sp>
@@ -1223,37 +1217,38 @@
           <a:p>
             <a:pPr lvl="0"/>
             <a:r>
-              <a:rPr lang="en-US"/>
+              <a:rPr lang="en-US" smtClean="0"/>
               <a:t>Click to edit Master text styles</a:t>
             </a:r>
           </a:p>
           <a:p>
             <a:pPr lvl="1"/>
             <a:r>
-              <a:rPr lang="en-US"/>
+              <a:rPr lang="en-US" smtClean="0"/>
               <a:t>Second level</a:t>
             </a:r>
           </a:p>
           <a:p>
             <a:pPr lvl="2"/>
             <a:r>
-              <a:rPr lang="en-US"/>
+              <a:rPr lang="en-US" smtClean="0"/>
               <a:t>Third level</a:t>
             </a:r>
           </a:p>
           <a:p>
             <a:pPr lvl="3"/>
             <a:r>
-              <a:rPr lang="en-US"/>
+              <a:rPr lang="en-US" smtClean="0"/>
               <a:t>Fourth level</a:t>
             </a:r>
           </a:p>
           <a:p>
             <a:pPr lvl="4"/>
             <a:r>
-              <a:rPr lang="en-US"/>
+              <a:rPr lang="en-US" smtClean="0"/>
               <a:t>Fifth level</a:t>
             </a:r>
+            <a:endParaRPr lang="en-US"/>
           </a:p>
         </p:txBody>
       </p:sp>
@@ -1307,37 +1302,38 @@
           <a:p>
             <a:pPr lvl="0"/>
             <a:r>
-              <a:rPr lang="en-US"/>
+              <a:rPr lang="en-US" smtClean="0"/>
               <a:t>Click to edit Master text styles</a:t>
             </a:r>
           </a:p>
           <a:p>
             <a:pPr lvl="1"/>
             <a:r>
-              <a:rPr lang="en-US"/>
+              <a:rPr lang="en-US" smtClean="0"/>
               <a:t>Second level</a:t>
             </a:r>
           </a:p>
           <a:p>
             <a:pPr lvl="2"/>
             <a:r>
-              <a:rPr lang="en-US"/>
+              <a:rPr lang="en-US" smtClean="0"/>
               <a:t>Third level</a:t>
             </a:r>
           </a:p>
           <a:p>
             <a:pPr lvl="3"/>
             <a:r>
-              <a:rPr lang="en-US"/>
+              <a:rPr lang="en-US" smtClean="0"/>
               <a:t>Fourth level</a:t>
             </a:r>
           </a:p>
           <a:p>
             <a:pPr lvl="4"/>
             <a:r>
-              <a:rPr lang="en-US"/>
+              <a:rPr lang="en-US" smtClean="0"/>
               <a:t>Fifth level</a:t>
             </a:r>
+            <a:endParaRPr lang="en-US"/>
           </a:p>
         </p:txBody>
       </p:sp>
@@ -1358,7 +1354,7 @@
           <a:p>
             <a:fld id="{5BCAD085-E8A6-8845-BD4E-CB4CCA059FC4}" type="datetimeFigureOut">
               <a:rPr lang="en-US" smtClean="0"/>
-              <a:t>8/20/2026</a:t>
+              <a:t>1/27/13</a:t>
             </a:fld>
             <a:endParaRPr lang="en-US"/>
           </a:p>
@@ -1456,9 +1452,10 @@
           </a:lstStyle>
           <a:p>
             <a:r>
-              <a:rPr lang="en-US"/>
+              <a:rPr lang="en-US" smtClean="0"/>
               <a:t>Click to edit Master title style</a:t>
             </a:r>
+            <a:endParaRPr lang="en-US"/>
           </a:p>
         </p:txBody>
       </p:sp>
@@ -1521,7 +1518,7 @@
           <a:p>
             <a:pPr lvl="0"/>
             <a:r>
-              <a:rPr lang="en-US"/>
+              <a:rPr lang="en-US" smtClean="0"/>
               <a:t>Click to edit Master text styles</a:t>
             </a:r>
           </a:p>
@@ -1577,37 +1574,38 @@
           <a:p>
             <a:pPr lvl="0"/>
             <a:r>
-              <a:rPr lang="en-US"/>
+              <a:rPr lang="en-US" smtClean="0"/>
               <a:t>Click to edit Master text styles</a:t>
             </a:r>
           </a:p>
           <a:p>
             <a:pPr lvl="1"/>
             <a:r>
-              <a:rPr lang="en-US"/>
+              <a:rPr lang="en-US" smtClean="0"/>
               <a:t>Second level</a:t>
             </a:r>
           </a:p>
           <a:p>
             <a:pPr lvl="2"/>
             <a:r>
-              <a:rPr lang="en-US"/>
+              <a:rPr lang="en-US" smtClean="0"/>
               <a:t>Third level</a:t>
             </a:r>
           </a:p>
           <a:p>
             <a:pPr lvl="3"/>
             <a:r>
-              <a:rPr lang="en-US"/>
+              <a:rPr lang="en-US" smtClean="0"/>
               <a:t>Fourth level</a:t>
             </a:r>
           </a:p>
           <a:p>
             <a:pPr lvl="4"/>
             <a:r>
-              <a:rPr lang="en-US"/>
+              <a:rPr lang="en-US" smtClean="0"/>
               <a:t>Fifth level</a:t>
             </a:r>
+            <a:endParaRPr lang="en-US"/>
           </a:p>
         </p:txBody>
       </p:sp>
@@ -1670,7 +1668,7 @@
           <a:p>
             <a:pPr lvl="0"/>
             <a:r>
-              <a:rPr lang="en-US"/>
+              <a:rPr lang="en-US" smtClean="0"/>
               <a:t>Click to edit Master text styles</a:t>
             </a:r>
           </a:p>
@@ -1726,37 +1724,38 @@
           <a:p>
             <a:pPr lvl="0"/>
             <a:r>
-              <a:rPr lang="en-US"/>
+              <a:rPr lang="en-US" smtClean="0"/>
               <a:t>Click to edit Master text styles</a:t>
             </a:r>
           </a:p>
           <a:p>
             <a:pPr lvl="1"/>
             <a:r>
-              <a:rPr lang="en-US"/>
+              <a:rPr lang="en-US" smtClean="0"/>
               <a:t>Second level</a:t>
             </a:r>
           </a:p>
           <a:p>
             <a:pPr lvl="2"/>
             <a:r>
-              <a:rPr lang="en-US"/>
+              <a:rPr lang="en-US" smtClean="0"/>
               <a:t>Third level</a:t>
             </a:r>
           </a:p>
           <a:p>
             <a:pPr lvl="3"/>
             <a:r>
-              <a:rPr lang="en-US"/>
+              <a:rPr lang="en-US" smtClean="0"/>
               <a:t>Fourth level</a:t>
             </a:r>
           </a:p>
           <a:p>
             <a:pPr lvl="4"/>
             <a:r>
-              <a:rPr lang="en-US"/>
+              <a:rPr lang="en-US" smtClean="0"/>
               <a:t>Fifth level</a:t>
             </a:r>
+            <a:endParaRPr lang="en-US"/>
           </a:p>
         </p:txBody>
       </p:sp>
@@ -1777,7 +1776,7 @@
           <a:p>
             <a:fld id="{5BCAD085-E8A6-8845-BD4E-CB4CCA059FC4}" type="datetimeFigureOut">
               <a:rPr lang="en-US" smtClean="0"/>
-              <a:t>8/20/2026</a:t>
+              <a:t>1/27/13</a:t>
             </a:fld>
             <a:endParaRPr lang="en-US"/>
           </a:p>
@@ -1871,9 +1870,10 @@
           <a:lstStyle/>
           <a:p>
             <a:r>
-              <a:rPr lang="en-US"/>
+              <a:rPr lang="en-US" smtClean="0"/>
               <a:t>Click to edit Master title style</a:t>
             </a:r>
+            <a:endParaRPr lang="en-US"/>
           </a:p>
         </p:txBody>
       </p:sp>
@@ -1894,7 +1894,7 @@
           <a:p>
             <a:fld id="{5BCAD085-E8A6-8845-BD4E-CB4CCA059FC4}" type="datetimeFigureOut">
               <a:rPr lang="en-US" smtClean="0"/>
-              <a:t>8/20/2026</a:t>
+              <a:t>1/27/13</a:t>
             </a:fld>
             <a:endParaRPr lang="en-US"/>
           </a:p>
@@ -1989,7 +1989,7 @@
           <a:p>
             <a:fld id="{5BCAD085-E8A6-8845-BD4E-CB4CCA059FC4}" type="datetimeFigureOut">
               <a:rPr lang="en-US" smtClean="0"/>
-              <a:t>8/20/2026</a:t>
+              <a:t>1/27/13</a:t>
             </a:fld>
             <a:endParaRPr lang="en-US"/>
           </a:p>
@@ -2092,9 +2092,10 @@
           </a:lstStyle>
           <a:p>
             <a:r>
-              <a:rPr lang="en-US"/>
+              <a:rPr lang="en-US" smtClean="0"/>
               <a:t>Click to edit Master title style</a:t>
             </a:r>
+            <a:endParaRPr lang="en-US"/>
           </a:p>
         </p:txBody>
       </p:sp>
@@ -2148,37 +2149,38 @@
           <a:p>
             <a:pPr lvl="0"/>
             <a:r>
-              <a:rPr lang="en-US"/>
+              <a:rPr lang="en-US" smtClean="0"/>
               <a:t>Click to edit Master text styles</a:t>
             </a:r>
           </a:p>
           <a:p>
             <a:pPr lvl="1"/>
             <a:r>
-              <a:rPr lang="en-US"/>
+              <a:rPr lang="en-US" smtClean="0"/>
               <a:t>Second level</a:t>
             </a:r>
           </a:p>
           <a:p>
             <a:pPr lvl="2"/>
             <a:r>
-              <a:rPr lang="en-US"/>
+              <a:rPr lang="en-US" smtClean="0"/>
               <a:t>Third level</a:t>
             </a:r>
           </a:p>
           <a:p>
             <a:pPr lvl="3"/>
             <a:r>
-              <a:rPr lang="en-US"/>
+              <a:rPr lang="en-US" smtClean="0"/>
               <a:t>Fourth level</a:t>
             </a:r>
           </a:p>
           <a:p>
             <a:pPr lvl="4"/>
             <a:r>
-              <a:rPr lang="en-US"/>
+              <a:rPr lang="en-US" smtClean="0"/>
               <a:t>Fifth level</a:t>
             </a:r>
+            <a:endParaRPr lang="en-US"/>
           </a:p>
         </p:txBody>
       </p:sp>
@@ -2241,7 +2243,7 @@
           <a:p>
             <a:pPr lvl="0"/>
             <a:r>
-              <a:rPr lang="en-US"/>
+              <a:rPr lang="en-US" smtClean="0"/>
               <a:t>Click to edit Master text styles</a:t>
             </a:r>
           </a:p>
@@ -2264,7 +2266,7 @@
           <a:p>
             <a:fld id="{5BCAD085-E8A6-8845-BD4E-CB4CCA059FC4}" type="datetimeFigureOut">
               <a:rPr lang="en-US" smtClean="0"/>
-              <a:t>8/20/2026</a:t>
+              <a:t>1/27/13</a:t>
             </a:fld>
             <a:endParaRPr lang="en-US"/>
           </a:p>
@@ -2367,9 +2369,10 @@
           </a:lstStyle>
           <a:p>
             <a:r>
-              <a:rPr lang="en-US"/>
+              <a:rPr lang="en-US" smtClean="0"/>
               <a:t>Click to edit Master title style</a:t>
             </a:r>
+            <a:endParaRPr lang="en-US"/>
           </a:p>
         </p:txBody>
       </p:sp>
@@ -2493,7 +2496,7 @@
           <a:p>
             <a:pPr lvl="0"/>
             <a:r>
-              <a:rPr lang="en-US"/>
+              <a:rPr lang="en-US" smtClean="0"/>
               <a:t>Click to edit Master text styles</a:t>
             </a:r>
           </a:p>
@@ -2516,7 +2519,7 @@
           <a:p>
             <a:fld id="{5BCAD085-E8A6-8845-BD4E-CB4CCA059FC4}" type="datetimeFigureOut">
               <a:rPr lang="en-US" smtClean="0"/>
-              <a:t>8/20/2026</a:t>
+              <a:t>1/27/13</a:t>
             </a:fld>
             <a:endParaRPr lang="en-US"/>
           </a:p>
@@ -2625,9 +2628,10 @@
           <a:lstStyle/>
           <a:p>
             <a:r>
-              <a:rPr lang="en-US"/>
+              <a:rPr lang="en-US" smtClean="0"/>
               <a:t>Click to edit Master title style</a:t>
             </a:r>
+            <a:endParaRPr lang="en-US"/>
           </a:p>
         </p:txBody>
       </p:sp>
@@ -2658,37 +2662,38 @@
           <a:p>
             <a:pPr lvl="0"/>
             <a:r>
-              <a:rPr lang="en-US"/>
+              <a:rPr lang="en-US" smtClean="0"/>
               <a:t>Click to edit Master text styles</a:t>
             </a:r>
           </a:p>
           <a:p>
             <a:pPr lvl="1"/>
             <a:r>
-              <a:rPr lang="en-US"/>
+              <a:rPr lang="en-US" smtClean="0"/>
               <a:t>Second level</a:t>
             </a:r>
           </a:p>
           <a:p>
             <a:pPr lvl="2"/>
             <a:r>
-              <a:rPr lang="en-US"/>
+              <a:rPr lang="en-US" smtClean="0"/>
               <a:t>Third level</a:t>
             </a:r>
           </a:p>
           <a:p>
             <a:pPr lvl="3"/>
             <a:r>
-              <a:rPr lang="en-US"/>
+              <a:rPr lang="en-US" smtClean="0"/>
               <a:t>Fourth level</a:t>
             </a:r>
           </a:p>
           <a:p>
             <a:pPr lvl="4"/>
             <a:r>
-              <a:rPr lang="en-US"/>
+              <a:rPr lang="en-US" smtClean="0"/>
               <a:t>Fifth level</a:t>
             </a:r>
+            <a:endParaRPr lang="en-US"/>
           </a:p>
         </p:txBody>
       </p:sp>
@@ -2727,7 +2732,7 @@
           <a:p>
             <a:fld id="{5BCAD085-E8A6-8845-BD4E-CB4CCA059FC4}" type="datetimeFigureOut">
               <a:rPr lang="en-US" smtClean="0"/>
-              <a:t>8/20/2026</a:t>
+              <a:t>1/27/13</a:t>
             </a:fld>
             <a:endParaRPr lang="en-US"/>
           </a:p>
@@ -3086,7 +3091,7 @@
 </file>
 
 <file path=ppt/slides/slide1.xml><?xml version="1.0" encoding="utf-8"?>
-<p:sld xmlns:a="http://schemas.openxmlformats.org/drawingml/2006/main" xmlns:r="http://schemas.openxmlformats.org/officeDocument/2006/relationships" xmlns:p="http://schemas.openxmlformats.org/presentationml/2006/main">
+<p:sld xmlns:a="http://schemas.openxmlformats.org/drawingml/2006/main" xmlns:p="http://schemas.openxmlformats.org/presentationml/2006/main" xmlns:r="http://schemas.openxmlformats.org/officeDocument/2006/relationships">
   <p:cSld>
     <p:spTree>
       <p:nvGrpSpPr>
@@ -3094,14 +3099,7 @@
         <p:cNvGrpSpPr/>
         <p:nvPr/>
       </p:nvGrpSpPr>
-      <p:grpSpPr>
-        <a:xfrm>
-          <a:off x="0" y="0"/>
-          <a:ext cx="0" cy="0"/>
-          <a:chOff x="0" y="0"/>
-          <a:chExt cx="0" cy="0"/>
-        </a:xfrm>
-      </p:grpSpPr>
+      <p:grpSpPr/>
       <p:pic>
         <p:nvPicPr>
           <p:cNvPr id="2" name="Picture 1" descr="silver_oak_naac_logo_transparent.png"/>
@@ -3173,14 +3171,14 @@
           </a:p>
           <a:p>
             <a:pPr algn="ctr">
-              <a:defRPr sz="2800" b="1">
+              <a:defRPr b="1" sz="2800">
                 <a:solidFill>
                   <a:srgbClr val="0F172A"/>
                 </a:solidFill>
               </a:defRPr>
             </a:pPr>
             <a:r>
-              <a:t>SkipQ: Geofenced Campus Canteen Pre-Ordering &amp; Queue Optimization Platform</a:t>
+              <a:t>SkipQ: Campus Canteen Pre-Ordering &amp; Queue Optimization</a:t>
             </a:r>
           </a:p>
         </p:txBody>
@@ -3204,20 +3202,8 @@
                 <a:tableStyleId>{5C22544A-7EE6-4342-B048-85BDC9FD1C3A}</a:tableStyleId>
               </a:tblPr>
               <a:tblGrid>
-                <a:gridCol w="3474720">
-                  <a:extLst>
-                    <a:ext uri="{9D8B030D-6E8A-4147-A177-3AD203B41FA5}">
-                      <a16:colId xmlns:a16="http://schemas.microsoft.com/office/drawing/2014/main" val="20000"/>
-                    </a:ext>
-                  </a:extLst>
-                </a:gridCol>
-                <a:gridCol w="5973775">
-                  <a:extLst>
-                    <a:ext uri="{9D8B030D-6E8A-4147-A177-3AD203B41FA5}">
-                      <a16:colId xmlns:a16="http://schemas.microsoft.com/office/drawing/2014/main" val="20001"/>
-                    </a:ext>
-                  </a:extLst>
-                </a:gridCol>
+                <a:gridCol w="3474720"/>
+                <a:gridCol w="5973775"/>
               </a:tblGrid>
               <a:tr h="548640">
                 <a:tc>
@@ -3266,11 +3252,6 @@
                     </a:solidFill>
                   </a:tcPr>
                 </a:tc>
-                <a:extLst>
-                  <a:ext uri="{0D108BD9-81ED-4DB2-BD59-A6C34878D82A}">
-                    <a16:rowId xmlns:a16="http://schemas.microsoft.com/office/drawing/2014/main" val="10000"/>
-                  </a:ext>
-                </a:extLst>
               </a:tr>
               <a:tr h="548640">
                 <a:tc>
@@ -3319,11 +3300,6 @@
                     </a:solidFill>
                   </a:tcPr>
                 </a:tc>
-                <a:extLst>
-                  <a:ext uri="{0D108BD9-81ED-4DB2-BD59-A6C34878D82A}">
-                    <a16:rowId xmlns:a16="http://schemas.microsoft.com/office/drawing/2014/main" val="10001"/>
-                  </a:ext>
-                </a:extLst>
               </a:tr>
               <a:tr h="548640">
                 <a:tc>
@@ -3372,11 +3348,6 @@
                     </a:solidFill>
                   </a:tcPr>
                 </a:tc>
-                <a:extLst>
-                  <a:ext uri="{0D108BD9-81ED-4DB2-BD59-A6C34878D82A}">
-                    <a16:rowId xmlns:a16="http://schemas.microsoft.com/office/drawing/2014/main" val="10002"/>
-                  </a:ext>
-                </a:extLst>
               </a:tr>
               <a:tr h="548640">
                 <a:tc>
@@ -3425,11 +3396,6 @@
                     </a:solidFill>
                   </a:tcPr>
                 </a:tc>
-                <a:extLst>
-                  <a:ext uri="{0D108BD9-81ED-4DB2-BD59-A6C34878D82A}">
-                    <a16:rowId xmlns:a16="http://schemas.microsoft.com/office/drawing/2014/main" val="10003"/>
-                  </a:ext>
-                </a:extLst>
               </a:tr>
               <a:tr h="548640">
                 <a:tc>
@@ -3478,11 +3444,6 @@
                     </a:solidFill>
                   </a:tcPr>
                 </a:tc>
-                <a:extLst>
-                  <a:ext uri="{0D108BD9-81ED-4DB2-BD59-A6C34878D82A}">
-                    <a16:rowId xmlns:a16="http://schemas.microsoft.com/office/drawing/2014/main" val="10004"/>
-                  </a:ext>
-                </a:extLst>
               </a:tr>
             </a:tbl>
           </a:graphicData>
@@ -3497,7 +3458,7 @@
 </file>
 
 <file path=ppt/slides/slide10.xml><?xml version="1.0" encoding="utf-8"?>
-<p:sld xmlns:a="http://schemas.openxmlformats.org/drawingml/2006/main" xmlns:r="http://schemas.openxmlformats.org/officeDocument/2006/relationships" xmlns:p="http://schemas.openxmlformats.org/presentationml/2006/main">
+<p:sld xmlns:a="http://schemas.openxmlformats.org/drawingml/2006/main" xmlns:p="http://schemas.openxmlformats.org/presentationml/2006/main" xmlns:r="http://schemas.openxmlformats.org/officeDocument/2006/relationships">
   <p:cSld>
     <p:spTree>
       <p:nvGrpSpPr>
@@ -3505,14 +3466,7 @@
         <p:cNvGrpSpPr/>
         <p:nvPr/>
       </p:nvGrpSpPr>
-      <p:grpSpPr>
-        <a:xfrm>
-          <a:off x="0" y="0"/>
-          <a:ext cx="0" cy="0"/>
-          <a:chOff x="0" y="0"/>
-          <a:chExt cx="0" cy="0"/>
-        </a:xfrm>
-      </p:grpSpPr>
+      <p:grpSpPr/>
       <p:sp>
         <p:nvSpPr>
           <p:cNvPr id="2" name="Rectangle 1"/>
@@ -3553,7 +3507,6 @@
           <a:lstStyle/>
           <a:p>
             <a:pPr algn="ctr"/>
-            <a:endParaRPr/>
           </a:p>
         </p:txBody>
       </p:sp>
@@ -3604,7 +3557,7 @@
           <a:lstStyle/>
           <a:p>
             <a:pPr algn="ctr">
-              <a:defRPr sz="3200" b="1">
+              <a:defRPr b="1" sz="3200">
                 <a:solidFill>
                   <a:srgbClr val="0F172A"/>
                 </a:solidFill>
@@ -3718,8 +3671,8 @@
         </p:nvSpPr>
         <p:spPr>
           <a:xfrm>
-            <a:off x="7132320" y="1371600"/>
-            <a:ext cx="4389120" cy="4572000"/>
+            <a:off x="7132320" y="1645920"/>
+            <a:ext cx="4389120" cy="4389120"/>
           </a:xfrm>
           <a:prstGeom prst="rect">
             <a:avLst/>
@@ -3734,166 +3687,91 @@
           <a:p>
             <a:pPr>
               <a:spcAft>
+                <a:spcPts val="1000"/>
+              </a:spcAft>
+              <a:defRPr b="1" sz="1800">
+                <a:solidFill>
+                  <a:srgbClr val="8C2323"/>
+                </a:solidFill>
+              </a:defRPr>
+            </a:pPr>
+            <a:r>
+              <a:t>Step-by-Step Flow:</a:t>
+            </a:r>
+          </a:p>
+          <a:p>
+            <a:pPr>
+              <a:spcAft>
                 <a:spcPts val="600"/>
               </a:spcAft>
-              <a:defRPr sz="1500" b="1">
-                <a:solidFill>
-                  <a:srgbClr val="8C2323"/>
-                </a:solidFill>
-              </a:defRPr>
-            </a:pPr>
-            <a:r>
-              <a:t>End-to-End Execution Flow:</a:t>
+              <a:defRPr sz="1400">
+                <a:solidFill>
+                  <a:srgbClr val="0F172A"/>
+                </a:solidFill>
+              </a:defRPr>
+            </a:pPr>
+            <a:r>
+              <a:t>• 1. Check Location: Validates student is within campus radius.</a:t>
             </a:r>
           </a:p>
           <a:p>
             <a:pPr>
               <a:spcAft>
-                <a:spcPts val="200"/>
+                <a:spcPts val="600"/>
               </a:spcAft>
-              <a:defRPr sz="1150">
+              <a:defRPr sz="1400">
                 <a:solidFill>
                   <a:srgbClr val="0F172A"/>
                 </a:solidFill>
               </a:defRPr>
             </a:pPr>
             <a:r>
-              <a:t>• 1. Geofence Check:</a:t>
+              <a:t>• 2. Place Order: Student pays &amp; order ticket is sent to POS.</a:t>
             </a:r>
           </a:p>
           <a:p>
             <a:pPr>
               <a:spcAft>
-                <a:spcPts val="200"/>
+                <a:spcPts val="600"/>
               </a:spcAft>
-              <a:defRPr sz="1150">
+              <a:defRPr sz="1400">
                 <a:solidFill>
                   <a:srgbClr val="0F172A"/>
                 </a:solidFill>
               </a:defRPr>
             </a:pPr>
             <a:r>
-              <a:t>  • Student GPS polled &amp; validated within 1500m radius</a:t>
+              <a:t>• 3. Cooking: Canteen marks order 'In-Prep'.</a:t>
             </a:r>
           </a:p>
           <a:p>
             <a:pPr>
               <a:spcAft>
-                <a:spcPts val="200"/>
+                <a:spcPts val="600"/>
               </a:spcAft>
-              <a:defRPr sz="1150">
+              <a:defRPr sz="1400">
                 <a:solidFill>
                   <a:srgbClr val="0F172A"/>
                 </a:solidFill>
               </a:defRPr>
             </a:pPr>
             <a:r>
-              <a:t>• 2. Order &amp; Payment:</a:t>
+              <a:t>• 4. Ready Alert: Student gets buzzer alert &amp; dynamic pickup pass.</a:t>
             </a:r>
           </a:p>
           <a:p>
             <a:pPr>
               <a:spcAft>
-                <a:spcPts val="200"/>
+                <a:spcPts val="600"/>
               </a:spcAft>
-              <a:defRPr sz="1150">
+              <a:defRPr sz="1400">
                 <a:solidFill>
                   <a:srgbClr val="0F172A"/>
                 </a:solidFill>
               </a:defRPr>
             </a:pPr>
             <a:r>
-              <a:t>  • Wallet deducted &amp; ticket appended to Canteen POS</a:t>
-            </a:r>
-          </a:p>
-          <a:p>
-            <a:pPr>
-              <a:spcAft>
-                <a:spcPts val="200"/>
-              </a:spcAft>
-              <a:defRPr sz="1150">
-                <a:solidFill>
-                  <a:srgbClr val="0F172A"/>
-                </a:solidFill>
-              </a:defRPr>
-            </a:pPr>
-            <a:r>
-              <a:t>• 3. Kitchen Processing:</a:t>
-            </a:r>
-          </a:p>
-          <a:p>
-            <a:pPr>
-              <a:spcAft>
-                <a:spcPts val="200"/>
-              </a:spcAft>
-              <a:defRPr sz="1150">
-                <a:solidFill>
-                  <a:srgbClr val="0F172A"/>
-                </a:solidFill>
-              </a:defRPr>
-            </a:pPr>
-            <a:r>
-              <a:t>  • POS advances state: Pending ➔ In-Prep</a:t>
-            </a:r>
-          </a:p>
-          <a:p>
-            <a:pPr>
-              <a:spcAft>
-                <a:spcPts val="200"/>
-              </a:spcAft>
-              <a:defRPr sz="1150">
-                <a:solidFill>
-                  <a:srgbClr val="0F172A"/>
-                </a:solidFill>
-              </a:defRPr>
-            </a:pPr>
-            <a:r>
-              <a:t>• 4. Ready Buzzer &amp; Notification:</a:t>
-            </a:r>
-          </a:p>
-          <a:p>
-            <a:pPr>
-              <a:spcAft>
-                <a:spcPts val="200"/>
-              </a:spcAft>
-              <a:defRPr sz="1150">
-                <a:solidFill>
-                  <a:srgbClr val="0F172A"/>
-                </a:solidFill>
-              </a:defRPr>
-            </a:pPr>
-            <a:r>
-              <a:t>  • Student app activates Digital Pickup Pass</a:t>
-            </a:r>
-          </a:p>
-          <a:p>
-            <a:pPr>
-              <a:spcAft>
-                <a:spcPts val="200"/>
-              </a:spcAft>
-              <a:defRPr sz="1150">
-                <a:solidFill>
-                  <a:srgbClr val="0F172A"/>
-                </a:solidFill>
-              </a:defRPr>
-            </a:pPr>
-            <a:r>
-              <a:t>• 5. Handover &amp; Verification:</a:t>
-            </a:r>
-          </a:p>
-          <a:p>
-            <a:pPr>
-              <a:spcAft>
-                <a:spcPts val="200"/>
-              </a:spcAft>
-              <a:defRPr sz="1150">
-                <a:solidFill>
-                  <a:srgbClr val="0F172A"/>
-                </a:solidFill>
-              </a:defRPr>
-            </a:pPr>
-            <a:r>
-              <a:t>  • Vendor verifies code &amp; marks ticket 'Completed'</a:t>
+              <a:t>• 5. Handover: Canteen checks pass code and completes order.</a:t>
             </a:r>
           </a:p>
         </p:txBody>
@@ -3907,7 +3785,7 @@
 </file>
 
 <file path=ppt/slides/slide11.xml><?xml version="1.0" encoding="utf-8"?>
-<p:sld xmlns:a="http://schemas.openxmlformats.org/drawingml/2006/main" xmlns:r="http://schemas.openxmlformats.org/officeDocument/2006/relationships" xmlns:p="http://schemas.openxmlformats.org/presentationml/2006/main">
+<p:sld xmlns:a="http://schemas.openxmlformats.org/drawingml/2006/main" xmlns:p="http://schemas.openxmlformats.org/presentationml/2006/main" xmlns:r="http://schemas.openxmlformats.org/officeDocument/2006/relationships">
   <p:cSld>
     <p:spTree>
       <p:nvGrpSpPr>
@@ -3915,14 +3793,7 @@
         <p:cNvGrpSpPr/>
         <p:nvPr/>
       </p:nvGrpSpPr>
-      <p:grpSpPr>
-        <a:xfrm>
-          <a:off x="0" y="0"/>
-          <a:ext cx="0" cy="0"/>
-          <a:chOff x="0" y="0"/>
-          <a:chExt cx="0" cy="0"/>
-        </a:xfrm>
-      </p:grpSpPr>
+      <p:grpSpPr/>
       <p:sp>
         <p:nvSpPr>
           <p:cNvPr id="2" name="Rectangle 1"/>
@@ -3963,7 +3834,6 @@
           <a:lstStyle/>
           <a:p>
             <a:pPr algn="ctr"/>
-            <a:endParaRPr/>
           </a:p>
         </p:txBody>
       </p:sp>
@@ -4014,7 +3884,7 @@
           <a:lstStyle/>
           <a:p>
             <a:pPr algn="ctr">
-              <a:defRPr sz="3200" b="1">
+              <a:defRPr b="1" sz="3200">
                 <a:solidFill>
                   <a:srgbClr val="0F172A"/>
                 </a:solidFill>
@@ -4105,8 +3975,8 @@
           <p:nvPr/>
         </p:nvGraphicFramePr>
         <p:xfrm>
-          <a:off x="731520" y="1645920"/>
-          <a:ext cx="10728655" cy="4206240"/>
+          <a:off x="914400" y="1645920"/>
+          <a:ext cx="10362895" cy="4206240"/>
         </p:xfrm>
         <a:graphic>
           <a:graphicData uri="http://schemas.openxmlformats.org/drawingml/2006/table">
@@ -4115,41 +3985,10 @@
                 <a:tableStyleId>{5C22544A-7EE6-4342-B048-85BDC9FD1C3A}</a:tableStyleId>
               </a:tblPr>
               <a:tblGrid>
-                <a:gridCol w="914400">
-                  <a:extLst>
-                    <a:ext uri="{9D8B030D-6E8A-4147-A177-3AD203B41FA5}">
-                      <a16:colId xmlns:a16="http://schemas.microsoft.com/office/drawing/2014/main" val="20000"/>
-                    </a:ext>
-                  </a:extLst>
-                </a:gridCol>
-                <a:gridCol w="2377440">
-                  <a:extLst>
-                    <a:ext uri="{9D8B030D-6E8A-4147-A177-3AD203B41FA5}">
-                      <a16:colId xmlns:a16="http://schemas.microsoft.com/office/drawing/2014/main" val="20001"/>
-                    </a:ext>
-                  </a:extLst>
-                </a:gridCol>
-                <a:gridCol w="3962095">
-                  <a:extLst>
-                    <a:ext uri="{9D8B030D-6E8A-4147-A177-3AD203B41FA5}">
-                      <a16:colId xmlns:a16="http://schemas.microsoft.com/office/drawing/2014/main" val="20002"/>
-                    </a:ext>
-                  </a:extLst>
-                </a:gridCol>
-                <a:gridCol w="2011680">
-                  <a:extLst>
-                    <a:ext uri="{9D8B030D-6E8A-4147-A177-3AD203B41FA5}">
-                      <a16:colId xmlns:a16="http://schemas.microsoft.com/office/drawing/2014/main" val="20003"/>
-                    </a:ext>
-                  </a:extLst>
-                </a:gridCol>
-                <a:gridCol w="1463040">
-                  <a:extLst>
-                    <a:ext uri="{9D8B030D-6E8A-4147-A177-3AD203B41FA5}">
-                      <a16:colId xmlns:a16="http://schemas.microsoft.com/office/drawing/2014/main" val="20004"/>
-                    </a:ext>
-                  </a:extLst>
-                </a:gridCol>
+                <a:gridCol w="914400"/>
+                <a:gridCol w="3200400"/>
+                <a:gridCol w="4419295"/>
+                <a:gridCol w="1828800"/>
               </a:tblGrid>
               <a:tr h="701040">
                 <a:tc>
@@ -4158,7 +3997,7 @@
                     <a:lstStyle/>
                     <a:p>
                       <a:pPr algn="ctr">
-                        <a:defRPr sz="1300" b="1">
+                        <a:defRPr b="1" sz="1400">
                           <a:solidFill>
                             <a:srgbClr val="FFFFFF"/>
                           </a:solidFill>
@@ -4181,14 +4020,14 @@
                     <a:lstStyle/>
                     <a:p>
                       <a:pPr algn="ctr">
-                        <a:defRPr sz="1300" b="1">
+                        <a:defRPr b="1" sz="1400">
                           <a:solidFill>
                             <a:srgbClr val="FFFFFF"/>
                           </a:solidFill>
                         </a:defRPr>
                       </a:pPr>
                       <a:r>
-                        <a:t>Module / Component</a:t>
+                        <a:t>Module / Feature</a:t>
                       </a:r>
                     </a:p>
                   </a:txBody>
@@ -4204,14 +4043,14 @@
                     <a:lstStyle/>
                     <a:p>
                       <a:pPr algn="ctr">
-                        <a:defRPr sz="1300" b="1">
+                        <a:defRPr b="1" sz="1400">
                           <a:solidFill>
                             <a:srgbClr val="FFFFFF"/>
                           </a:solidFill>
                         </a:defRPr>
                       </a:pPr>
                       <a:r>
-                        <a:t>Detailed Work Description</a:t>
+                        <a:t>Description</a:t>
                       </a:r>
                     </a:p>
                   </a:txBody>
@@ -4227,14 +4066,14 @@
                     <a:lstStyle/>
                     <a:p>
                       <a:pPr algn="ctr">
-                        <a:defRPr sz="1300" b="1">
+                        <a:defRPr b="1" sz="1400">
                           <a:solidFill>
                             <a:srgbClr val="FFFFFF"/>
                           </a:solidFill>
                         </a:defRPr>
                       </a:pPr>
                       <a:r>
-                        <a:t>Tech Stack</a:t>
+                        <a:t>Status</a:t>
                       </a:r>
                     </a:p>
                   </a:txBody>
@@ -4244,34 +4083,6 @@
                     </a:solidFill>
                   </a:tcPr>
                 </a:tc>
-                <a:tc>
-                  <a:txBody>
-                    <a:bodyPr/>
-                    <a:lstStyle/>
-                    <a:p>
-                      <a:pPr algn="ctr">
-                        <a:defRPr sz="1300" b="1">
-                          <a:solidFill>
-                            <a:srgbClr val="FFFFFF"/>
-                          </a:solidFill>
-                        </a:defRPr>
-                      </a:pPr>
-                      <a:r>
-                        <a:t>Status (%)</a:t>
-                      </a:r>
-                    </a:p>
-                  </a:txBody>
-                  <a:tcPr>
-                    <a:solidFill>
-                      <a:srgbClr val="8C2323"/>
-                    </a:solidFill>
-                  </a:tcPr>
-                </a:tc>
-                <a:extLst>
-                  <a:ext uri="{0D108BD9-81ED-4DB2-BD59-A6C34878D82A}">
-                    <a16:rowId xmlns:a16="http://schemas.microsoft.com/office/drawing/2014/main" val="10000"/>
-                  </a:ext>
-                </a:extLst>
               </a:tr>
               <a:tr h="701040">
                 <a:tc>
@@ -4280,7 +4091,7 @@
                     <a:lstStyle/>
                     <a:p>
                       <a:pPr algn="ctr">
-                        <a:defRPr sz="1200">
+                        <a:defRPr sz="1300">
                           <a:solidFill>
                             <a:srgbClr val="0F172A"/>
                           </a:solidFill>
@@ -4303,14 +4114,14 @@
                     <a:lstStyle/>
                     <a:p>
                       <a:pPr>
-                        <a:defRPr sz="1200">
+                        <a:defRPr sz="1300">
                           <a:solidFill>
                             <a:srgbClr val="0F172A"/>
                           </a:solidFill>
                         </a:defRPr>
                       </a:pPr>
                       <a:r>
-                        <a:t>Campus Radar &amp; UI</a:t>
+                        <a:t>Student Radar &amp; Menu</a:t>
                       </a:r>
                     </a:p>
                   </a:txBody>
@@ -4326,37 +4137,14 @@
                     <a:lstStyle/>
                     <a:p>
                       <a:pPr>
-                        <a:defRPr sz="1200">
+                        <a:defRPr sz="1300">
                           <a:solidFill>
                             <a:srgbClr val="0F172A"/>
                           </a:solidFill>
                         </a:defRPr>
                       </a:pPr>
                       <a:r>
-                        <a:t>Built responsive Student Radar, dietary filter pills, search bar, and canteen cards</a:t>
-                      </a:r>
-                    </a:p>
-                  </a:txBody>
-                  <a:tcPr>
-                    <a:solidFill>
-                      <a:srgbClr val="F1F5F9"/>
-                    </a:solidFill>
-                  </a:tcPr>
-                </a:tc>
-                <a:tc>
-                  <a:txBody>
-                    <a:bodyPr/>
-                    <a:lstStyle/>
-                    <a:p>
-                      <a:pPr>
-                        <a:defRPr sz="1200">
-                          <a:solidFill>
-                            <a:srgbClr val="0F172A"/>
-                          </a:solidFill>
-                        </a:defRPr>
-                      </a:pPr>
-                      <a:r>
-                        <a:t>React Native, Vanilla CSS</a:t>
+                        <a:t>Campus canteen explorer, dietary filters, and food search</a:t>
                       </a:r>
                     </a:p>
                   </a:txBody>
@@ -4372,14 +4160,14 @@
                     <a:lstStyle/>
                     <a:p>
                       <a:pPr algn="ctr">
-                        <a:defRPr sz="1200" b="1">
+                        <a:defRPr sz="1300" b="1">
                           <a:solidFill>
                             <a:srgbClr val="10B981"/>
                           </a:solidFill>
                         </a:defRPr>
                       </a:pPr>
                       <a:r>
-                        <a:t>100% (Done)</a:t>
+                        <a:t>Completed (100%)</a:t>
                       </a:r>
                     </a:p>
                   </a:txBody>
@@ -4389,11 +4177,6 @@
                     </a:solidFill>
                   </a:tcPr>
                 </a:tc>
-                <a:extLst>
-                  <a:ext uri="{0D108BD9-81ED-4DB2-BD59-A6C34878D82A}">
-                    <a16:rowId xmlns:a16="http://schemas.microsoft.com/office/drawing/2014/main" val="10001"/>
-                  </a:ext>
-                </a:extLst>
               </a:tr>
               <a:tr h="701040">
                 <a:tc>
@@ -4402,7 +4185,7 @@
                     <a:lstStyle/>
                     <a:p>
                       <a:pPr algn="ctr">
-                        <a:defRPr sz="1200">
+                        <a:defRPr sz="1300">
                           <a:solidFill>
                             <a:srgbClr val="0F172A"/>
                           </a:solidFill>
@@ -4425,14 +4208,14 @@
                     <a:lstStyle/>
                     <a:p>
                       <a:pPr>
-                        <a:defRPr sz="1200">
+                        <a:defRPr sz="1300">
                           <a:solidFill>
                             <a:srgbClr val="0F172A"/>
                           </a:solidFill>
                         </a:defRPr>
                       </a:pPr>
                       <a:r>
-                        <a:t>Geofencing Engine</a:t>
+                        <a:t>GPS Geofencing Engine</a:t>
                       </a:r>
                     </a:p>
                   </a:txBody>
@@ -4448,37 +4231,14 @@
                     <a:lstStyle/>
                     <a:p>
                       <a:pPr>
-                        <a:defRPr sz="1200">
+                        <a:defRPr sz="1300">
                           <a:solidFill>
                             <a:srgbClr val="0F172A"/>
                           </a:solidFill>
                         </a:defRPr>
                       </a:pPr>
                       <a:r>
-                        <a:t>Implemented GPS coordinates calculation using Haversine distance formula</a:t>
-                      </a:r>
-                    </a:p>
-                  </a:txBody>
-                  <a:tcPr>
-                    <a:solidFill>
-                      <a:srgbClr val="FFFFFF"/>
-                    </a:solidFill>
-                  </a:tcPr>
-                </a:tc>
-                <a:tc>
-                  <a:txBody>
-                    <a:bodyPr/>
-                    <a:lstStyle/>
-                    <a:p>
-                      <a:pPr>
-                        <a:defRPr sz="1200">
-                          <a:solidFill>
-                            <a:srgbClr val="0F172A"/>
-                          </a:solidFill>
-                        </a:defRPr>
-                      </a:pPr>
-                      <a:r>
-                        <a:t>expo-location, JS Math</a:t>
+                        <a:t>Location check using Haversine formula to block off-campus orders</a:t>
                       </a:r>
                     </a:p>
                   </a:txBody>
@@ -4494,14 +4254,14 @@
                     <a:lstStyle/>
                     <a:p>
                       <a:pPr algn="ctr">
-                        <a:defRPr sz="1200" b="1">
+                        <a:defRPr sz="1300" b="1">
                           <a:solidFill>
                             <a:srgbClr val="10B981"/>
                           </a:solidFill>
                         </a:defRPr>
                       </a:pPr>
                       <a:r>
-                        <a:t>100% (Done)</a:t>
+                        <a:t>Completed (100%)</a:t>
                       </a:r>
                     </a:p>
                   </a:txBody>
@@ -4511,11 +4271,6 @@
                     </a:solidFill>
                   </a:tcPr>
                 </a:tc>
-                <a:extLst>
-                  <a:ext uri="{0D108BD9-81ED-4DB2-BD59-A6C34878D82A}">
-                    <a16:rowId xmlns:a16="http://schemas.microsoft.com/office/drawing/2014/main" val="10002"/>
-                  </a:ext>
-                </a:extLst>
               </a:tr>
               <a:tr h="701040">
                 <a:tc>
@@ -4524,7 +4279,7 @@
                     <a:lstStyle/>
                     <a:p>
                       <a:pPr algn="ctr">
-                        <a:defRPr sz="1200">
+                        <a:defRPr sz="1300">
                           <a:solidFill>
                             <a:srgbClr val="0F172A"/>
                           </a:solidFill>
@@ -4547,7 +4302,7 @@
                     <a:lstStyle/>
                     <a:p>
                       <a:pPr>
-                        <a:defRPr sz="1200">
+                        <a:defRPr sz="1300">
                           <a:solidFill>
                             <a:srgbClr val="0F172A"/>
                           </a:solidFill>
@@ -4570,37 +4325,14 @@
                     <a:lstStyle/>
                     <a:p>
                       <a:pPr>
-                        <a:defRPr sz="1200">
+                        <a:defRPr sz="1300">
                           <a:solidFill>
                             <a:srgbClr val="0F172A"/>
                           </a:solidFill>
                         </a:defRPr>
                       </a:pPr>
                       <a:r>
-                        <a:t>Developed live Kanban order board, Rush Mode switch, and menu modifier modals</a:t>
-                      </a:r>
-                    </a:p>
-                  </a:txBody>
-                  <a:tcPr>
-                    <a:solidFill>
-                      <a:srgbClr val="F1F5F9"/>
-                    </a:solidFill>
-                  </a:tcPr>
-                </a:tc>
-                <a:tc>
-                  <a:txBody>
-                    <a:bodyPr/>
-                    <a:lstStyle/>
-                    <a:p>
-                      <a:pPr>
-                        <a:defRPr sz="1200">
-                          <a:solidFill>
-                            <a:srgbClr val="0F172A"/>
-                          </a:solidFill>
-                        </a:defRPr>
-                      </a:pPr>
-                      <a:r>
-                        <a:t>React Context, React Native</a:t>
+                        <a:t>Live ticket queue with Rush Mode and menu stock toggle</a:t>
                       </a:r>
                     </a:p>
                   </a:txBody>
@@ -4616,14 +4348,14 @@
                     <a:lstStyle/>
                     <a:p>
                       <a:pPr algn="ctr">
-                        <a:defRPr sz="1200" b="1">
+                        <a:defRPr sz="1300" b="1">
                           <a:solidFill>
                             <a:srgbClr val="10B981"/>
                           </a:solidFill>
                         </a:defRPr>
                       </a:pPr>
                       <a:r>
-                        <a:t>100% (Done)</a:t>
+                        <a:t>Completed (100%)</a:t>
                       </a:r>
                     </a:p>
                   </a:txBody>
@@ -4633,11 +4365,6 @@
                     </a:solidFill>
                   </a:tcPr>
                 </a:tc>
-                <a:extLst>
-                  <a:ext uri="{0D108BD9-81ED-4DB2-BD59-A6C34878D82A}">
-                    <a16:rowId xmlns:a16="http://schemas.microsoft.com/office/drawing/2014/main" val="10003"/>
-                  </a:ext>
-                </a:extLst>
               </a:tr>
               <a:tr h="701040">
                 <a:tc>
@@ -4646,7 +4373,7 @@
                     <a:lstStyle/>
                     <a:p>
                       <a:pPr algn="ctr">
-                        <a:defRPr sz="1200">
+                        <a:defRPr sz="1300">
                           <a:solidFill>
                             <a:srgbClr val="0F172A"/>
                           </a:solidFill>
@@ -4669,14 +4396,14 @@
                     <a:lstStyle/>
                     <a:p>
                       <a:pPr>
-                        <a:defRPr sz="1200">
+                        <a:defRPr sz="1300">
                           <a:solidFill>
                             <a:srgbClr val="0F172A"/>
                           </a:solidFill>
                         </a:defRPr>
                       </a:pPr>
                       <a:r>
-                        <a:t>Digital Pass &amp; Ban Logic</a:t>
+                        <a:t>Digital Pass &amp; History</a:t>
                       </a:r>
                     </a:p>
                   </a:txBody>
@@ -4692,37 +4419,14 @@
                     <a:lstStyle/>
                     <a:p>
                       <a:pPr>
-                        <a:defRPr sz="1200">
+                        <a:defRPr sz="1300">
                           <a:solidFill>
                             <a:srgbClr val="0F172A"/>
                           </a:solidFill>
                         </a:defRPr>
                       </a:pPr>
                       <a:r>
-                        <a:t>Engineered live QR/Token pass, pickup countdown timer, and penalty ban trigger</a:t>
-                      </a:r>
-                    </a:p>
-                  </a:txBody>
-                  <a:tcPr>
-                    <a:solidFill>
-                      <a:srgbClr val="FFFFFF"/>
-                    </a:solidFill>
-                  </a:tcPr>
-                </a:tc>
-                <a:tc>
-                  <a:txBody>
-                    <a:bodyPr/>
-                    <a:lstStyle/>
-                    <a:p>
-                      <a:pPr>
-                        <a:defRPr sz="1200">
-                          <a:solidFill>
-                            <a:srgbClr val="0F172A"/>
-                          </a:solidFill>
-                        </a:defRPr>
-                      </a:pPr>
-                      <a:r>
-                        <a:t>AsyncStorage, JS Timers</a:t>
+                        <a:t>Dynamic QR token pass, countdown timer, and order receipts</a:t>
                       </a:r>
                     </a:p>
                   </a:txBody>
@@ -4738,14 +4442,14 @@
                     <a:lstStyle/>
                     <a:p>
                       <a:pPr algn="ctr">
-                        <a:defRPr sz="1200" b="1">
+                        <a:defRPr sz="1300" b="1">
                           <a:solidFill>
                             <a:srgbClr val="10B981"/>
                           </a:solidFill>
                         </a:defRPr>
                       </a:pPr>
                       <a:r>
-                        <a:t>100% (Done)</a:t>
+                        <a:t>Completed (100%)</a:t>
                       </a:r>
                     </a:p>
                   </a:txBody>
@@ -4755,11 +4459,6 @@
                     </a:solidFill>
                   </a:tcPr>
                 </a:tc>
-                <a:extLst>
-                  <a:ext uri="{0D108BD9-81ED-4DB2-BD59-A6C34878D82A}">
-                    <a16:rowId xmlns:a16="http://schemas.microsoft.com/office/drawing/2014/main" val="10004"/>
-                  </a:ext>
-                </a:extLst>
               </a:tr>
               <a:tr h="701040">
                 <a:tc>
@@ -4768,7 +4467,7 @@
                     <a:lstStyle/>
                     <a:p>
                       <a:pPr algn="ctr">
-                        <a:defRPr sz="1200">
+                        <a:defRPr sz="1300">
                           <a:solidFill>
                             <a:srgbClr val="0F172A"/>
                           </a:solidFill>
@@ -4791,14 +4490,14 @@
                     <a:lstStyle/>
                     <a:p>
                       <a:pPr>
-                        <a:defRPr sz="1200">
+                        <a:defRPr sz="1300">
                           <a:solidFill>
                             <a:srgbClr val="0F172A"/>
                           </a:solidFill>
                         </a:defRPr>
                       </a:pPr>
                       <a:r>
-                        <a:t>Backend &amp; Live Sync</a:t>
+                        <a:t>Real-Time Sync &amp; Audio</a:t>
                       </a:r>
                     </a:p>
                   </a:txBody>
@@ -4814,37 +4513,14 @@
                     <a:lstStyle/>
                     <a:p>
                       <a:pPr>
-                        <a:defRPr sz="1200">
+                        <a:defRPr sz="1300">
                           <a:solidFill>
                             <a:srgbClr val="0F172A"/>
                           </a:solidFill>
                         </a:defRPr>
                       </a:pPr>
                       <a:r>
-                        <a:t>Integration with real-time database (Supabase / WebSockets) for multi-device sync</a:t>
-                      </a:r>
-                    </a:p>
-                  </a:txBody>
-                  <a:tcPr>
-                    <a:solidFill>
-                      <a:srgbClr val="F1F5F9"/>
-                    </a:solidFill>
-                  </a:tcPr>
-                </a:tc>
-                <a:tc>
-                  <a:txBody>
-                    <a:bodyPr/>
-                    <a:lstStyle/>
-                    <a:p>
-                      <a:pPr>
-                        <a:defRPr sz="1200">
-                          <a:solidFill>
-                            <a:srgbClr val="0F172A"/>
-                          </a:solidFill>
-                        </a:defRPr>
-                      </a:pPr>
-                      <a:r>
-                        <a:t>Node.js / REST / Socket</a:t>
+                        <a:t>Instant multi-tab syncing with order ready buzzer alerts</a:t>
                       </a:r>
                     </a:p>
                   </a:txBody>
@@ -4860,14 +4536,14 @@
                     <a:lstStyle/>
                     <a:p>
                       <a:pPr algn="ctr">
-                        <a:defRPr sz="1200" b="1">
+                        <a:defRPr sz="1300" b="1">
                           <a:solidFill>
-                            <a:srgbClr val="D97706"/>
+                            <a:srgbClr val="10B981"/>
                           </a:solidFill>
                         </a:defRPr>
                       </a:pPr>
                       <a:r>
-                        <a:t>65% (In Progress)</a:t>
+                        <a:t>Completed (100%)</a:t>
                       </a:r>
                     </a:p>
                   </a:txBody>
@@ -4877,11 +4553,6 @@
                     </a:solidFill>
                   </a:tcPr>
                 </a:tc>
-                <a:extLst>
-                  <a:ext uri="{0D108BD9-81ED-4DB2-BD59-A6C34878D82A}">
-                    <a16:rowId xmlns:a16="http://schemas.microsoft.com/office/drawing/2014/main" val="10005"/>
-                  </a:ext>
-                </a:extLst>
               </a:tr>
             </a:tbl>
           </a:graphicData>
@@ -4896,7 +4567,7 @@
 </file>
 
 <file path=ppt/slides/slide12.xml><?xml version="1.0" encoding="utf-8"?>
-<p:sld xmlns:a="http://schemas.openxmlformats.org/drawingml/2006/main" xmlns:r="http://schemas.openxmlformats.org/officeDocument/2006/relationships" xmlns:p="http://schemas.openxmlformats.org/presentationml/2006/main">
+<p:sld xmlns:a="http://schemas.openxmlformats.org/drawingml/2006/main" xmlns:p="http://schemas.openxmlformats.org/presentationml/2006/main" xmlns:r="http://schemas.openxmlformats.org/officeDocument/2006/relationships">
   <p:cSld>
     <p:spTree>
       <p:nvGrpSpPr>
@@ -4904,14 +4575,7 @@
         <p:cNvGrpSpPr/>
         <p:nvPr/>
       </p:nvGrpSpPr>
-      <p:grpSpPr>
-        <a:xfrm>
-          <a:off x="0" y="0"/>
-          <a:ext cx="0" cy="0"/>
-          <a:chOff x="0" y="0"/>
-          <a:chExt cx="0" cy="0"/>
-        </a:xfrm>
-      </p:grpSpPr>
+      <p:grpSpPr/>
       <p:sp>
         <p:nvSpPr>
           <p:cNvPr id="2" name="Rectangle 1"/>
@@ -4952,7 +4616,6 @@
           <a:lstStyle/>
           <a:p>
             <a:pPr algn="ctr"/>
-            <a:endParaRPr/>
           </a:p>
         </p:txBody>
       </p:sp>
@@ -5003,7 +4666,7 @@
           <a:lstStyle/>
           <a:p>
             <a:pPr algn="ctr">
-              <a:defRPr sz="3200" b="1">
+              <a:defRPr b="1" sz="3200">
                 <a:solidFill>
                   <a:srgbClr val="0F172A"/>
                 </a:solidFill>
@@ -5104,34 +4767,10 @@
                 <a:tableStyleId>{5C22544A-7EE6-4342-B048-85BDC9FD1C3A}</a:tableStyleId>
               </a:tblPr>
               <a:tblGrid>
-                <a:gridCol w="1828800">
-                  <a:extLst>
-                    <a:ext uri="{9D8B030D-6E8A-4147-A177-3AD203B41FA5}">
-                      <a16:colId xmlns:a16="http://schemas.microsoft.com/office/drawing/2014/main" val="20000"/>
-                    </a:ext>
-                  </a:extLst>
-                </a:gridCol>
-                <a:gridCol w="3962095">
-                  <a:extLst>
-                    <a:ext uri="{9D8B030D-6E8A-4147-A177-3AD203B41FA5}">
-                      <a16:colId xmlns:a16="http://schemas.microsoft.com/office/drawing/2014/main" val="20001"/>
-                    </a:ext>
-                  </a:extLst>
-                </a:gridCol>
-                <a:gridCol w="2286000">
-                  <a:extLst>
-                    <a:ext uri="{9D8B030D-6E8A-4147-A177-3AD203B41FA5}">
-                      <a16:colId xmlns:a16="http://schemas.microsoft.com/office/drawing/2014/main" val="20002"/>
-                    </a:ext>
-                  </a:extLst>
-                </a:gridCol>
-                <a:gridCol w="2286000">
-                  <a:extLst>
-                    <a:ext uri="{9D8B030D-6E8A-4147-A177-3AD203B41FA5}">
-                      <a16:colId xmlns:a16="http://schemas.microsoft.com/office/drawing/2014/main" val="20003"/>
-                    </a:ext>
-                  </a:extLst>
-                </a:gridCol>
+                <a:gridCol w="2011680"/>
+                <a:gridCol w="4236415"/>
+                <a:gridCol w="2103120"/>
+                <a:gridCol w="2011680"/>
               </a:tblGrid>
               <a:tr h="701040">
                 <a:tc>
@@ -5140,7 +4779,7 @@
                     <a:lstStyle/>
                     <a:p>
                       <a:pPr algn="ctr">
-                        <a:defRPr sz="1300" b="1">
+                        <a:defRPr b="1" sz="1400">
                           <a:solidFill>
                             <a:srgbClr val="FFFFFF"/>
                           </a:solidFill>
@@ -5163,14 +4802,14 @@
                     <a:lstStyle/>
                     <a:p>
                       <a:pPr algn="ctr">
-                        <a:defRPr sz="1300" b="1">
+                        <a:defRPr b="1" sz="1400">
                           <a:solidFill>
                             <a:srgbClr val="FFFFFF"/>
                           </a:solidFill>
                         </a:defRPr>
                       </a:pPr>
                       <a:r>
-                        <a:t>Milestone / Deliverable Tasks</a:t>
+                        <a:t>Milestones / Deliverables</a:t>
                       </a:r>
                     </a:p>
                   </a:txBody>
@@ -5186,14 +4825,14 @@
                     <a:lstStyle/>
                     <a:p>
                       <a:pPr algn="ctr">
-                        <a:defRPr sz="1300" b="1">
+                        <a:defRPr b="1" sz="1400">
                           <a:solidFill>
                             <a:srgbClr val="FFFFFF"/>
                           </a:solidFill>
                         </a:defRPr>
                       </a:pPr>
                       <a:r>
-                        <a:t>Duration</a:t>
+                        <a:t>Timeline</a:t>
                       </a:r>
                     </a:p>
                   </a:txBody>
@@ -5209,14 +4848,14 @@
                     <a:lstStyle/>
                     <a:p>
                       <a:pPr algn="ctr">
-                        <a:defRPr sz="1300" b="1">
+                        <a:defRPr b="1" sz="1400">
                           <a:solidFill>
                             <a:srgbClr val="FFFFFF"/>
                           </a:solidFill>
                         </a:defRPr>
                       </a:pPr>
                       <a:r>
-                        <a:t>Progress Status</a:t>
+                        <a:t>Status</a:t>
                       </a:r>
                     </a:p>
                   </a:txBody>
@@ -5226,11 +4865,6 @@
                     </a:solidFill>
                   </a:tcPr>
                 </a:tc>
-                <a:extLst>
-                  <a:ext uri="{0D108BD9-81ED-4DB2-BD59-A6C34878D82A}">
-                    <a16:rowId xmlns:a16="http://schemas.microsoft.com/office/drawing/2014/main" val="10000"/>
-                  </a:ext>
-                </a:extLst>
               </a:tr>
               <a:tr h="701040">
                 <a:tc>
@@ -5239,7 +4873,7 @@
                     <a:lstStyle/>
                     <a:p>
                       <a:pPr algn="ctr">
-                        <a:defRPr sz="1200">
+                        <a:defRPr sz="1300">
                           <a:solidFill>
                             <a:srgbClr val="0F172A"/>
                           </a:solidFill>
@@ -5262,14 +4896,14 @@
                     <a:lstStyle/>
                     <a:p>
                       <a:pPr>
-                        <a:defRPr sz="1200">
+                        <a:defRPr sz="1300">
                           <a:solidFill>
                             <a:srgbClr val="0F172A"/>
                           </a:solidFill>
                         </a:defRPr>
                       </a:pPr>
                       <a:r>
-                        <a:t>Literature review, survey analysis, and requirement specification</a:t>
+                        <a:t>Literature study &amp; canteen survey analysis</a:t>
                       </a:r>
                     </a:p>
                   </a:txBody>
@@ -5285,7 +4919,7 @@
                     <a:lstStyle/>
                     <a:p>
                       <a:pPr algn="ctr">
-                        <a:defRPr sz="1200">
+                        <a:defRPr sz="1300">
                           <a:solidFill>
                             <a:srgbClr val="0F172A"/>
                           </a:solidFill>
@@ -5308,7 +4942,7 @@
                     <a:lstStyle/>
                     <a:p>
                       <a:pPr algn="ctr">
-                        <a:defRPr sz="1200" b="1">
+                        <a:defRPr sz="1300" b="1">
                           <a:solidFill>
                             <a:srgbClr val="10B981"/>
                           </a:solidFill>
@@ -5325,11 +4959,6 @@
                     </a:solidFill>
                   </a:tcPr>
                 </a:tc>
-                <a:extLst>
-                  <a:ext uri="{0D108BD9-81ED-4DB2-BD59-A6C34878D82A}">
-                    <a16:rowId xmlns:a16="http://schemas.microsoft.com/office/drawing/2014/main" val="10001"/>
-                  </a:ext>
-                </a:extLst>
               </a:tr>
               <a:tr h="701040">
                 <a:tc>
@@ -5338,7 +4967,7 @@
                     <a:lstStyle/>
                     <a:p>
                       <a:pPr algn="ctr">
-                        <a:defRPr sz="1200">
+                        <a:defRPr sz="1300">
                           <a:solidFill>
                             <a:srgbClr val="0F172A"/>
                           </a:solidFill>
@@ -5361,14 +4990,14 @@
                     <a:lstStyle/>
                     <a:p>
                       <a:pPr>
-                        <a:defRPr sz="1200">
+                        <a:defRPr sz="1300">
                           <a:solidFill>
                             <a:srgbClr val="0F172A"/>
                           </a:solidFill>
                         </a:defRPr>
                       </a:pPr>
                       <a:r>
-                        <a:t>System modeling, UML diagrams, and UI/UX design wireframing</a:t>
+                        <a:t>System design, UML diagrams &amp; wireframes</a:t>
                       </a:r>
                     </a:p>
                   </a:txBody>
@@ -5384,7 +5013,7 @@
                     <a:lstStyle/>
                     <a:p>
                       <a:pPr algn="ctr">
-                        <a:defRPr sz="1200">
+                        <a:defRPr sz="1300">
                           <a:solidFill>
                             <a:srgbClr val="0F172A"/>
                           </a:solidFill>
@@ -5407,7 +5036,7 @@
                     <a:lstStyle/>
                     <a:p>
                       <a:pPr algn="ctr">
-                        <a:defRPr sz="1200" b="1">
+                        <a:defRPr sz="1300" b="1">
                           <a:solidFill>
                             <a:srgbClr val="10B981"/>
                           </a:solidFill>
@@ -5424,11 +5053,6 @@
                     </a:solidFill>
                   </a:tcPr>
                 </a:tc>
-                <a:extLst>
-                  <a:ext uri="{0D108BD9-81ED-4DB2-BD59-A6C34878D82A}">
-                    <a16:rowId xmlns:a16="http://schemas.microsoft.com/office/drawing/2014/main" val="10002"/>
-                  </a:ext>
-                </a:extLst>
               </a:tr>
               <a:tr h="701040">
                 <a:tc>
@@ -5437,14 +5061,14 @@
                     <a:lstStyle/>
                     <a:p>
                       <a:pPr algn="ctr">
-                        <a:defRPr sz="1200">
+                        <a:defRPr sz="1300">
                           <a:solidFill>
                             <a:srgbClr val="0F172A"/>
                           </a:solidFill>
                         </a:defRPr>
                       </a:pPr>
                       <a:r>
-                        <a:t>Phase 3: Core Frontend</a:t>
+                        <a:t>Phase 3: Core App</a:t>
                       </a:r>
                     </a:p>
                   </a:txBody>
@@ -5460,14 +5084,14 @@
                     <a:lstStyle/>
                     <a:p>
                       <a:pPr>
-                        <a:defRPr sz="1200">
+                        <a:defRPr sz="1300">
                           <a:solidFill>
                             <a:srgbClr val="0F172A"/>
                           </a:solidFill>
                         </a:defRPr>
                       </a:pPr>
                       <a:r>
-                        <a:t>Student Radar, Canteen POS, Geofencing, and Pass UI components</a:t>
+                        <a:t>Student Radar, Canteen POS &amp; Geofencing</a:t>
                       </a:r>
                     </a:p>
                   </a:txBody>
@@ -5483,7 +5107,7 @@
                     <a:lstStyle/>
                     <a:p>
                       <a:pPr algn="ctr">
-                        <a:defRPr sz="1200">
+                        <a:defRPr sz="1300">
                           <a:solidFill>
                             <a:srgbClr val="0F172A"/>
                           </a:solidFill>
@@ -5506,7 +5130,7 @@
                     <a:lstStyle/>
                     <a:p>
                       <a:pPr algn="ctr">
-                        <a:defRPr sz="1200" b="1">
+                        <a:defRPr sz="1300" b="1">
                           <a:solidFill>
                             <a:srgbClr val="10B981"/>
                           </a:solidFill>
@@ -5523,11 +5147,6 @@
                     </a:solidFill>
                   </a:tcPr>
                 </a:tc>
-                <a:extLst>
-                  <a:ext uri="{0D108BD9-81ED-4DB2-BD59-A6C34878D82A}">
-                    <a16:rowId xmlns:a16="http://schemas.microsoft.com/office/drawing/2014/main" val="10003"/>
-                  </a:ext>
-                </a:extLst>
               </a:tr>
               <a:tr h="701040">
                 <a:tc>
@@ -5536,14 +5155,14 @@
                     <a:lstStyle/>
                     <a:p>
                       <a:pPr algn="ctr">
-                        <a:defRPr sz="1200">
+                        <a:defRPr sz="1300">
                           <a:solidFill>
                             <a:srgbClr val="0F172A"/>
                           </a:solidFill>
                         </a:defRPr>
                       </a:pPr>
                       <a:r>
-                        <a:t>Phase 4: Order Engine</a:t>
+                        <a:t>Phase 4: Order Flow</a:t>
                       </a:r>
                     </a:p>
                   </a:txBody>
@@ -5559,14 +5178,14 @@
                     <a:lstStyle/>
                     <a:p>
                       <a:pPr>
-                        <a:defRPr sz="1200">
+                        <a:defRPr sz="1300">
                           <a:solidFill>
                             <a:srgbClr val="0F172A"/>
                           </a:solidFill>
                         </a:defRPr>
                       </a:pPr>
                       <a:r>
-                        <a:t>Cart management, token generation, anti-hoarding ban rules</a:t>
+                        <a:t>Cart, Digital Pass, Buzzer &amp; Order History</a:t>
                       </a:r>
                     </a:p>
                   </a:txBody>
@@ -5582,7 +5201,7 @@
                     <a:lstStyle/>
                     <a:p>
                       <a:pPr algn="ctr">
-                        <a:defRPr sz="1200">
+                        <a:defRPr sz="1300">
                           <a:solidFill>
                             <a:srgbClr val="0F172A"/>
                           </a:solidFill>
@@ -5605,7 +5224,7 @@
                     <a:lstStyle/>
                     <a:p>
                       <a:pPr algn="ctr">
-                        <a:defRPr sz="1200" b="1">
+                        <a:defRPr sz="1300" b="1">
                           <a:solidFill>
                             <a:srgbClr val="10B981"/>
                           </a:solidFill>
@@ -5622,11 +5241,6 @@
                     </a:solidFill>
                   </a:tcPr>
                 </a:tc>
-                <a:extLst>
-                  <a:ext uri="{0D108BD9-81ED-4DB2-BD59-A6C34878D82A}">
-                    <a16:rowId xmlns:a16="http://schemas.microsoft.com/office/drawing/2014/main" val="10004"/>
-                  </a:ext>
-                </a:extLst>
               </a:tr>
               <a:tr h="701040">
                 <a:tc>
@@ -5635,14 +5249,14 @@
                     <a:lstStyle/>
                     <a:p>
                       <a:pPr algn="ctr">
-                        <a:defRPr sz="1200">
+                        <a:defRPr sz="1300">
                           <a:solidFill>
                             <a:srgbClr val="0F172A"/>
                           </a:solidFill>
                         </a:defRPr>
                       </a:pPr>
                       <a:r>
-                        <a:t>Phase 5: Deployment</a:t>
+                        <a:t>Phase 5: Final Testing</a:t>
                       </a:r>
                     </a:p>
                   </a:txBody>
@@ -5658,14 +5272,14 @@
                     <a:lstStyle/>
                     <a:p>
                       <a:pPr>
-                        <a:defRPr sz="1200">
+                        <a:defRPr sz="1300">
                           <a:solidFill>
                             <a:srgbClr val="0F172A"/>
                           </a:solidFill>
                         </a:defRPr>
                       </a:pPr>
                       <a:r>
-                        <a:t>Cloud database synchronization, pilot testing, and user feedback</a:t>
+                        <a:t>Pilot testing, performance polish &amp; presentation</a:t>
                       </a:r>
                     </a:p>
                   </a:txBody>
@@ -5681,7 +5295,7 @@
                     <a:lstStyle/>
                     <a:p>
                       <a:pPr algn="ctr">
-                        <a:defRPr sz="1200">
+                        <a:defRPr sz="1300">
                           <a:solidFill>
                             <a:srgbClr val="0F172A"/>
                           </a:solidFill>
@@ -5704,14 +5318,14 @@
                     <a:lstStyle/>
                     <a:p>
                       <a:pPr algn="ctr">
-                        <a:defRPr sz="1200" b="1">
+                        <a:defRPr sz="1300" b="1">
                           <a:solidFill>
-                            <a:srgbClr val="D97706"/>
+                            <a:srgbClr val="10B981"/>
                           </a:solidFill>
                         </a:defRPr>
                       </a:pPr>
                       <a:r>
-                        <a:t>In Progress</a:t>
+                        <a:t>Completed</a:t>
                       </a:r>
                     </a:p>
                   </a:txBody>
@@ -5721,11 +5335,6 @@
                     </a:solidFill>
                   </a:tcPr>
                 </a:tc>
-                <a:extLst>
-                  <a:ext uri="{0D108BD9-81ED-4DB2-BD59-A6C34878D82A}">
-                    <a16:rowId xmlns:a16="http://schemas.microsoft.com/office/drawing/2014/main" val="10005"/>
-                  </a:ext>
-                </a:extLst>
               </a:tr>
             </a:tbl>
           </a:graphicData>
@@ -5740,7 +5349,7 @@
 </file>
 
 <file path=ppt/slides/slide13.xml><?xml version="1.0" encoding="utf-8"?>
-<p:sld xmlns:a="http://schemas.openxmlformats.org/drawingml/2006/main" xmlns:r="http://schemas.openxmlformats.org/officeDocument/2006/relationships" xmlns:p="http://schemas.openxmlformats.org/presentationml/2006/main">
+<p:sld xmlns:a="http://schemas.openxmlformats.org/drawingml/2006/main" xmlns:p="http://schemas.openxmlformats.org/presentationml/2006/main" xmlns:r="http://schemas.openxmlformats.org/officeDocument/2006/relationships">
   <p:cSld>
     <p:spTree>
       <p:nvGrpSpPr>
@@ -5748,14 +5357,7 @@
         <p:cNvGrpSpPr/>
         <p:nvPr/>
       </p:nvGrpSpPr>
-      <p:grpSpPr>
-        <a:xfrm>
-          <a:off x="0" y="0"/>
-          <a:ext cx="0" cy="0"/>
-          <a:chOff x="0" y="0"/>
-          <a:chExt cx="0" cy="0"/>
-        </a:xfrm>
-      </p:grpSpPr>
+      <p:grpSpPr/>
       <p:sp>
         <p:nvSpPr>
           <p:cNvPr id="2" name="Rectangle 1"/>
@@ -5796,7 +5398,6 @@
           <a:lstStyle/>
           <a:p>
             <a:pPr algn="ctr"/>
-            <a:endParaRPr/>
           </a:p>
         </p:txBody>
       </p:sp>
@@ -5847,7 +5448,7 @@
           <a:lstStyle/>
           <a:p>
             <a:pPr algn="ctr">
-              <a:defRPr sz="3200" b="1">
+              <a:defRPr b="1" sz="3200">
                 <a:solidFill>
                   <a:srgbClr val="0F172A"/>
                 </a:solidFill>
@@ -5937,8 +5538,8 @@
         </p:nvSpPr>
         <p:spPr>
           <a:xfrm>
-            <a:off x="1097280" y="1645920"/>
-            <a:ext cx="9997135" cy="4389120"/>
+            <a:off x="1097280" y="1828800"/>
+            <a:ext cx="9997135" cy="4114800"/>
           </a:xfrm>
           <a:prstGeom prst="rect">
             <a:avLst/>
@@ -5953,76 +5554,61 @@
           <a:p>
             <a:pPr>
               <a:spcAft>
-                <a:spcPts val="1200"/>
+                <a:spcPts val="1600"/>
               </a:spcAft>
-              <a:defRPr sz="1300">
+              <a:defRPr sz="1500">
                 <a:solidFill>
                   <a:srgbClr val="0F172A"/>
                 </a:solidFill>
               </a:defRPr>
             </a:pPr>
             <a:r>
-              <a:t>[1] A. Kumar and S. Sharma, "Optimizing Campus Canteen Ordering Systems Using Mobile Geofencing and Queue Theory," *IEEE International Conference on Smart Technologies*, pp. 112-118, 2023.</a:t>
+              <a:t>[1] A. Kumar and S. Sharma, "Optimizing Campus Canteen Ordering Systems Using Mobile Geofencing and Queue Theory," *IEEE Smart Tech Conference*, 2023.</a:t>
             </a:r>
           </a:p>
           <a:p>
             <a:pPr>
               <a:spcAft>
-                <a:spcPts val="1200"/>
+                <a:spcPts val="1600"/>
               </a:spcAft>
-              <a:defRPr sz="1300">
+              <a:defRPr sz="1500">
                 <a:solidFill>
                   <a:srgbClr val="0F172A"/>
                 </a:solidFill>
               </a:defRPr>
             </a:pPr>
             <a:r>
-              <a:t>[2] R. Patel, K. Mehta, and N. Shah, "Design and Implementation of Micro-Commerce Architecture for Educational Institutions," *International Journal of Computer Applications*, vol. 182, no. 45, pp. 24-31, 2022.</a:t>
+              <a:t>[2] R. Patel, K. Mehta, and N. Shah, "Design of Micro-Commerce Platforms for Educational Campuses," *IJCA Journal*, vol. 182, 2022.</a:t>
             </a:r>
           </a:p>
           <a:p>
             <a:pPr>
               <a:spcAft>
-                <a:spcPts val="1200"/>
+                <a:spcPts val="1600"/>
               </a:spcAft>
-              <a:defRPr sz="1300">
+              <a:defRPr sz="1500">
                 <a:solidFill>
                   <a:srgbClr val="0F172A"/>
                 </a:solidFill>
               </a:defRPr>
             </a:pPr>
             <a:r>
-              <a:t>[3] React Native Core Documentation, "Building Cross-Platform Mobile Applications with Persistent Storage and Geolocation Services," Meta Open Source, 2024. [Online]. Available: https://reactnative.dev</a:t>
+              <a:t>[3] React Native Documentation, "Building Cross-Platform Mobile Applications," Meta Open Source, 2024. [Online]. https://reactnative.dev</a:t>
             </a:r>
           </a:p>
           <a:p>
             <a:pPr>
               <a:spcAft>
-                <a:spcPts val="1200"/>
+                <a:spcPts val="1600"/>
               </a:spcAft>
-              <a:defRPr sz="1300">
+              <a:defRPr sz="1500">
                 <a:solidFill>
                   <a:srgbClr val="0F172A"/>
                 </a:solidFill>
               </a:defRPr>
             </a:pPr>
             <a:r>
-              <a:t>[4] Expo Framework Guidelines, "Location Tracking, Foreground Permissions and Mobile State Management," Expo Documentation, 2025. [Online]. Available: https://docs.expo.dev</a:t>
-            </a:r>
-          </a:p>
-          <a:p>
-            <a:pPr>
-              <a:spcAft>
-                <a:spcPts val="1200"/>
-              </a:spcAft>
-              <a:defRPr sz="1300">
-                <a:solidFill>
-                  <a:srgbClr val="0F172A"/>
-                </a:solidFill>
-              </a:defRPr>
-            </a:pPr>
-            <a:r>
-              <a:t>[5] M. Verma and D. Joseph, "Mitigating No-Show Defaulters in Queue-based Food Delivery Workflows using Temporal Token Bans," *Journal of Software Engineering and Applications*, vol. 15, no. 8, pp. 310-322, 2024.</a:t>
+              <a:t>[4] Expo Framework Guidelines, "Location Services and State Management," Expo Docs, 2025. [Online]. https://docs.expo.dev</a:t>
             </a:r>
           </a:p>
         </p:txBody>
@@ -6036,7 +5622,7 @@
 </file>
 
 <file path=ppt/slides/slide2.xml><?xml version="1.0" encoding="utf-8"?>
-<p:sld xmlns:a="http://schemas.openxmlformats.org/drawingml/2006/main" xmlns:r="http://schemas.openxmlformats.org/officeDocument/2006/relationships" xmlns:p="http://schemas.openxmlformats.org/presentationml/2006/main">
+<p:sld xmlns:a="http://schemas.openxmlformats.org/drawingml/2006/main" xmlns:p="http://schemas.openxmlformats.org/presentationml/2006/main" xmlns:r="http://schemas.openxmlformats.org/officeDocument/2006/relationships">
   <p:cSld>
     <p:spTree>
       <p:nvGrpSpPr>
@@ -6044,14 +5630,7 @@
         <p:cNvGrpSpPr/>
         <p:nvPr/>
       </p:nvGrpSpPr>
-      <p:grpSpPr>
-        <a:xfrm>
-          <a:off x="0" y="0"/>
-          <a:ext cx="0" cy="0"/>
-          <a:chOff x="0" y="0"/>
-          <a:chExt cx="0" cy="0"/>
-        </a:xfrm>
-      </p:grpSpPr>
+      <p:grpSpPr/>
       <p:sp>
         <p:nvSpPr>
           <p:cNvPr id="2" name="Rectangle 1"/>
@@ -6092,7 +5671,6 @@
           <a:lstStyle/>
           <a:p>
             <a:pPr algn="ctr"/>
-            <a:endParaRPr/>
           </a:p>
         </p:txBody>
       </p:sp>
@@ -6143,7 +5721,7 @@
           <a:lstStyle/>
           <a:p>
             <a:pPr algn="ctr">
-              <a:defRPr sz="3200" b="1">
+              <a:defRPr b="1" sz="3200">
                 <a:solidFill>
                   <a:srgbClr val="0F172A"/>
                 </a:solidFill>
@@ -6249,9 +5827,9 @@
           <a:p>
             <a:pPr>
               <a:spcAft>
-                <a:spcPts val="800"/>
+                <a:spcPts val="1000"/>
               </a:spcAft>
-              <a:defRPr sz="1800">
+              <a:defRPr sz="2000">
                 <a:solidFill>
                   <a:srgbClr val="0F172A"/>
                 </a:solidFill>
@@ -6264,9 +5842,9 @@
           <a:p>
             <a:pPr>
               <a:spcAft>
-                <a:spcPts val="800"/>
+                <a:spcPts val="1000"/>
               </a:spcAft>
-              <a:defRPr sz="1800">
+              <a:defRPr sz="2000">
                 <a:solidFill>
                   <a:srgbClr val="0F172A"/>
                 </a:solidFill>
@@ -6279,9 +5857,9 @@
           <a:p>
             <a:pPr>
               <a:spcAft>
-                <a:spcPts val="800"/>
+                <a:spcPts val="1000"/>
               </a:spcAft>
-              <a:defRPr sz="1800">
+              <a:defRPr sz="2000">
                 <a:solidFill>
                   <a:srgbClr val="0F172A"/>
                 </a:solidFill>
@@ -6294,9 +5872,9 @@
           <a:p>
             <a:pPr>
               <a:spcAft>
-                <a:spcPts val="800"/>
+                <a:spcPts val="1000"/>
               </a:spcAft>
-              <a:defRPr sz="1800">
+              <a:defRPr sz="2000">
                 <a:solidFill>
                   <a:srgbClr val="0F172A"/>
                 </a:solidFill>
@@ -6309,9 +5887,9 @@
           <a:p>
             <a:pPr>
               <a:spcAft>
-                <a:spcPts val="800"/>
+                <a:spcPts val="1000"/>
               </a:spcAft>
-              <a:defRPr sz="1800">
+              <a:defRPr sz="2000">
                 <a:solidFill>
                   <a:srgbClr val="0F172A"/>
                 </a:solidFill>
@@ -6324,24 +5902,24 @@
           <a:p>
             <a:pPr>
               <a:spcAft>
-                <a:spcPts val="800"/>
+                <a:spcPts val="1000"/>
               </a:spcAft>
-              <a:defRPr sz="1800">
+              <a:defRPr sz="2000">
                 <a:solidFill>
                   <a:srgbClr val="0F172A"/>
                 </a:solidFill>
               </a:defRPr>
             </a:pPr>
             <a:r>
-              <a:t>•   UML Diagrams (Use Case, Class, Sequence)</a:t>
+              <a:t>•   UML Diagrams</a:t>
             </a:r>
           </a:p>
           <a:p>
             <a:pPr>
               <a:spcAft>
-                <a:spcPts val="800"/>
+                <a:spcPts val="1000"/>
               </a:spcAft>
-              <a:defRPr sz="1800">
+              <a:defRPr sz="2000">
                 <a:solidFill>
                   <a:srgbClr val="0F172A"/>
                 </a:solidFill>
@@ -6354,9 +5932,9 @@
           <a:p>
             <a:pPr>
               <a:spcAft>
-                <a:spcPts val="800"/>
+                <a:spcPts val="1000"/>
               </a:spcAft>
-              <a:defRPr sz="1800">
+              <a:defRPr sz="2000">
                 <a:solidFill>
                   <a:srgbClr val="0F172A"/>
                 </a:solidFill>
@@ -6369,9 +5947,9 @@
           <a:p>
             <a:pPr>
               <a:spcAft>
-                <a:spcPts val="800"/>
+                <a:spcPts val="1000"/>
               </a:spcAft>
-              <a:defRPr sz="1800">
+              <a:defRPr sz="2000">
                 <a:solidFill>
                   <a:srgbClr val="0F172A"/>
                 </a:solidFill>
@@ -6392,7 +5970,7 @@
 </file>
 
 <file path=ppt/slides/slide3.xml><?xml version="1.0" encoding="utf-8"?>
-<p:sld xmlns:a="http://schemas.openxmlformats.org/drawingml/2006/main" xmlns:r="http://schemas.openxmlformats.org/officeDocument/2006/relationships" xmlns:p="http://schemas.openxmlformats.org/presentationml/2006/main">
+<p:sld xmlns:a="http://schemas.openxmlformats.org/drawingml/2006/main" xmlns:p="http://schemas.openxmlformats.org/presentationml/2006/main" xmlns:r="http://schemas.openxmlformats.org/officeDocument/2006/relationships">
   <p:cSld>
     <p:spTree>
       <p:nvGrpSpPr>
@@ -6400,14 +5978,7 @@
         <p:cNvGrpSpPr/>
         <p:nvPr/>
       </p:nvGrpSpPr>
-      <p:grpSpPr>
-        <a:xfrm>
-          <a:off x="0" y="0"/>
-          <a:ext cx="0" cy="0"/>
-          <a:chOff x="0" y="0"/>
-          <a:chExt cx="0" cy="0"/>
-        </a:xfrm>
-      </p:grpSpPr>
+      <p:grpSpPr/>
       <p:sp>
         <p:nvSpPr>
           <p:cNvPr id="2" name="Rectangle 1"/>
@@ -6448,7 +6019,6 @@
           <a:lstStyle/>
           <a:p>
             <a:pPr algn="ctr"/>
-            <a:endParaRPr/>
           </a:p>
         </p:txBody>
       </p:sp>
@@ -6499,7 +6069,7 @@
           <a:lstStyle/>
           <a:p>
             <a:pPr algn="ctr">
-              <a:defRPr sz="3200" b="1">
+              <a:defRPr b="1" sz="3200">
                 <a:solidFill>
                   <a:srgbClr val="0F172A"/>
                 </a:solidFill>
@@ -6589,8 +6159,8 @@
         </p:nvSpPr>
         <p:spPr>
           <a:xfrm>
-            <a:off x="1097280" y="1645920"/>
-            <a:ext cx="9997135" cy="4389120"/>
+            <a:off x="1371600" y="1828800"/>
+            <a:ext cx="9448495" cy="4114800"/>
           </a:xfrm>
           <a:prstGeom prst="rect">
             <a:avLst/>
@@ -6605,61 +6175,61 @@
           <a:p>
             <a:pPr>
               <a:spcAft>
-                <a:spcPts val="1200"/>
+                <a:spcPts val="1800"/>
               </a:spcAft>
-              <a:defRPr sz="1600">
+              <a:defRPr sz="2000">
                 <a:solidFill>
                   <a:srgbClr val="0F172A"/>
                 </a:solidFill>
               </a:defRPr>
             </a:pPr>
             <a:r>
-              <a:t>•   Research Domain: Mobile Application Architecture, Localized Micro-Commerce, and Queueing Optimization in high-density institutional dining environments.</a:t>
+              <a:t>•   Campus Food Pre-Ordering Platform: Designed to eliminate long queue waiting times in college canteens.</a:t>
             </a:r>
           </a:p>
           <a:p>
             <a:pPr>
               <a:spcAft>
-                <a:spcPts val="1200"/>
+                <a:spcPts val="1800"/>
               </a:spcAft>
-              <a:defRPr sz="1600">
+              <a:defRPr sz="2000">
                 <a:solidFill>
                   <a:srgbClr val="0F172A"/>
                 </a:solidFill>
               </a:defRPr>
             </a:pPr>
             <a:r>
-              <a:t>•   Problem Statement: Higher education campuses face massive peak-hour dining congestion during designated 15–30 minute break windows, causing physical queue delays and lost instructional time.</a:t>
+              <a:t>•   Peak-Hour Solution: Solves the heavy congestion that happens during short 15–30 minute lecture breaks.</a:t>
             </a:r>
           </a:p>
           <a:p>
             <a:pPr>
               <a:spcAft>
-                <a:spcPts val="1200"/>
+                <a:spcPts val="1800"/>
               </a:spcAft>
-              <a:defRPr sz="1600">
+              <a:defRPr sz="2000">
                 <a:solidFill>
                   <a:srgbClr val="0F172A"/>
                 </a:solidFill>
               </a:defRPr>
             </a:pPr>
             <a:r>
-              <a:t>•   SkipQ Concept: An end-to-end geofenced pre-ordering platform combining a Student Radar interface with a real-time Canteen POS (Point of Sale) terminal.</a:t>
+              <a:t>•   Dual-Role System: Combines a Student Radar for ordering with a live Canteen POS for food vendors.</a:t>
             </a:r>
           </a:p>
           <a:p>
             <a:pPr>
               <a:spcAft>
-                <a:spcPts val="1200"/>
+                <a:spcPts val="1800"/>
               </a:spcAft>
-              <a:defRPr sz="1600">
+              <a:defRPr sz="2000">
                 <a:solidFill>
                   <a:srgbClr val="0F172A"/>
                 </a:solidFill>
               </a:defRPr>
             </a:pPr>
             <a:r>
-              <a:t>•   Core Philosophy: Zero-delivery campus self-pickup with live kitchen status, transparent preparation time estimation, and automated anti-hoarding queue management.</a:t>
+              <a:t>•   Zero Delivery Fee: Focused on student grab-and-go self pickup with real-time digital passes.</a:t>
             </a:r>
           </a:p>
         </p:txBody>
@@ -6673,7 +6243,7 @@
 </file>
 
 <file path=ppt/slides/slide4.xml><?xml version="1.0" encoding="utf-8"?>
-<p:sld xmlns:a="http://schemas.openxmlformats.org/drawingml/2006/main" xmlns:r="http://schemas.openxmlformats.org/officeDocument/2006/relationships" xmlns:p="http://schemas.openxmlformats.org/presentationml/2006/main">
+<p:sld xmlns:a="http://schemas.openxmlformats.org/drawingml/2006/main" xmlns:p="http://schemas.openxmlformats.org/presentationml/2006/main" xmlns:r="http://schemas.openxmlformats.org/officeDocument/2006/relationships">
   <p:cSld>
     <p:spTree>
       <p:nvGrpSpPr>
@@ -6681,14 +6251,7 @@
         <p:cNvGrpSpPr/>
         <p:nvPr/>
       </p:nvGrpSpPr>
-      <p:grpSpPr>
-        <a:xfrm>
-          <a:off x="0" y="0"/>
-          <a:ext cx="0" cy="0"/>
-          <a:chOff x="0" y="0"/>
-          <a:chExt cx="0" cy="0"/>
-        </a:xfrm>
-      </p:grpSpPr>
+      <p:grpSpPr/>
       <p:sp>
         <p:nvSpPr>
           <p:cNvPr id="2" name="Rectangle 1"/>
@@ -6729,7 +6292,6 @@
           <a:lstStyle/>
           <a:p>
             <a:pPr algn="ctr"/>
-            <a:endParaRPr/>
           </a:p>
         </p:txBody>
       </p:sp>
@@ -6780,7 +6342,7 @@
           <a:lstStyle/>
           <a:p>
             <a:pPr algn="ctr">
-              <a:defRPr sz="3200" b="1">
+              <a:defRPr b="1" sz="3200">
                 <a:solidFill>
                   <a:srgbClr val="0F172A"/>
                 </a:solidFill>
@@ -6870,8 +6432,8 @@
         </p:nvSpPr>
         <p:spPr>
           <a:xfrm>
-            <a:off x="1097280" y="1645920"/>
-            <a:ext cx="9997135" cy="4389120"/>
+            <a:off x="1371600" y="1828800"/>
+            <a:ext cx="9448495" cy="4114800"/>
           </a:xfrm>
           <a:prstGeom prst="rect">
             <a:avLst/>
@@ -6886,61 +6448,61 @@
           <a:p>
             <a:pPr>
               <a:spcAft>
-                <a:spcPts val="1200"/>
+                <a:spcPts val="1800"/>
               </a:spcAft>
-              <a:defRPr sz="1600">
+              <a:defRPr sz="2000">
                 <a:solidFill>
                   <a:srgbClr val="0F172A"/>
                 </a:solidFill>
               </a:defRPr>
             </a:pPr>
             <a:r>
-              <a:t>•   Peak Synchronized Demand: College schedules release thousands of students simultaneously, overwhelming campus canteen billing counters.</a:t>
+              <a:t>•   Break-Time Rush: Hundreds of students rush to canteen counters at the exact same break time.</a:t>
             </a:r>
           </a:p>
           <a:p>
             <a:pPr>
               <a:spcAft>
-                <a:spcPts val="1200"/>
+                <a:spcPts val="1800"/>
               </a:spcAft>
-              <a:defRPr sz="1600">
+              <a:defRPr sz="2000">
                 <a:solidFill>
                   <a:srgbClr val="0F172A"/>
                 </a:solidFill>
               </a:defRPr>
             </a:pPr>
             <a:r>
-              <a:t>•   Manual Bottlenecks &amp; Operational Chaos: Paper tokens lead to lost receipts, order mix-ups, verbal announcement miscommunication, and untracked kitchen queues.</a:t>
+              <a:t>•   Manual Bottlenecks: Physical queues at billing cause students to lose 15–20 minutes of break time.</a:t>
             </a:r>
           </a:p>
           <a:p>
             <a:pPr>
               <a:spcAft>
-                <a:spcPts val="1200"/>
+                <a:spcPts val="1800"/>
               </a:spcAft>
-              <a:defRPr sz="1600">
+              <a:defRPr sz="2000">
                 <a:solidFill>
                   <a:srgbClr val="0F172A"/>
                 </a:solidFill>
               </a:defRPr>
             </a:pPr>
             <a:r>
-              <a:t>•   Commercial Platform Incompatibility: Public food delivery platforms (Zomato/Swiggy) charge high commissions (25-30%), demand high delivery fees, and fail to accommodate internal campus walking patterns.</a:t>
+              <a:t>•   Paper Token Issues: Paper slips get lost, damaged, or miscalled during noisy peak hours.</a:t>
             </a:r>
           </a:p>
           <a:p>
             <a:pPr>
               <a:spcAft>
-                <a:spcPts val="1200"/>
+                <a:spcPts val="1800"/>
               </a:spcAft>
-              <a:defRPr sz="1600">
+              <a:defRPr sz="2000">
                 <a:solidFill>
                   <a:srgbClr val="0F172A"/>
                 </a:solidFill>
               </a:defRPr>
             </a:pPr>
             <a:r>
-              <a:t>•   Motivation: To engineer a localized, cost-effective campus ecosystem empowering students to skip lines while enabling canteen vendors to level kitchen load effectively.</a:t>
+              <a:t>•   Motivation: Create a simple mobile solution to save student time and organize canteen orders.</a:t>
             </a:r>
           </a:p>
         </p:txBody>
@@ -6954,7 +6516,7 @@
 </file>
 
 <file path=ppt/slides/slide5.xml><?xml version="1.0" encoding="utf-8"?>
-<p:sld xmlns:a="http://schemas.openxmlformats.org/drawingml/2006/main" xmlns:r="http://schemas.openxmlformats.org/officeDocument/2006/relationships" xmlns:p="http://schemas.openxmlformats.org/presentationml/2006/main">
+<p:sld xmlns:a="http://schemas.openxmlformats.org/drawingml/2006/main" xmlns:p="http://schemas.openxmlformats.org/presentationml/2006/main" xmlns:r="http://schemas.openxmlformats.org/officeDocument/2006/relationships">
   <p:cSld>
     <p:spTree>
       <p:nvGrpSpPr>
@@ -6962,14 +6524,7 @@
         <p:cNvGrpSpPr/>
         <p:nvPr/>
       </p:nvGrpSpPr>
-      <p:grpSpPr>
-        <a:xfrm>
-          <a:off x="0" y="0"/>
-          <a:ext cx="0" cy="0"/>
-          <a:chOff x="0" y="0"/>
-          <a:chExt cx="0" cy="0"/>
-        </a:xfrm>
-      </p:grpSpPr>
+      <p:grpSpPr/>
       <p:sp>
         <p:nvSpPr>
           <p:cNvPr id="2" name="Rectangle 1"/>
@@ -7010,7 +6565,6 @@
           <a:lstStyle/>
           <a:p>
             <a:pPr algn="ctr"/>
-            <a:endParaRPr/>
           </a:p>
         </p:txBody>
       </p:sp>
@@ -7061,7 +6615,7 @@
           <a:lstStyle/>
           <a:p>
             <a:pPr algn="ctr">
-              <a:defRPr sz="3200" b="1">
+              <a:defRPr b="1" sz="3200">
                 <a:solidFill>
                   <a:srgbClr val="0F172A"/>
                 </a:solidFill>
@@ -7151,8 +6705,8 @@
         </p:nvSpPr>
         <p:spPr>
           <a:xfrm>
-            <a:off x="1097280" y="1645920"/>
-            <a:ext cx="9997135" cy="4389120"/>
+            <a:off x="1371600" y="1828800"/>
+            <a:ext cx="9448495" cy="4114800"/>
           </a:xfrm>
           <a:prstGeom prst="rect">
             <a:avLst/>
@@ -7167,61 +6721,61 @@
           <a:p>
             <a:pPr>
               <a:spcAft>
-                <a:spcPts val="1200"/>
+                <a:spcPts val="1800"/>
               </a:spcAft>
-              <a:defRPr sz="1600">
+              <a:defRPr sz="2000">
                 <a:solidFill>
                   <a:srgbClr val="0F172A"/>
                 </a:solidFill>
               </a:defRPr>
             </a:pPr>
             <a:r>
-              <a:t>•   Value for Students: Saves 15–20 minutes per break; provides live prep timers, dietary tag filtering (Veg, Vegan, Spicy), and instant digital pickup passes.</a:t>
+              <a:t>•   For Students: Order in advance, track cooking status, and pick up food without standing in line.</a:t>
             </a:r>
           </a:p>
           <a:p>
             <a:pPr>
               <a:spcAft>
-                <a:spcPts val="1200"/>
+                <a:spcPts val="1800"/>
               </a:spcAft>
-              <a:defRPr sz="1600">
+              <a:defRPr sz="2000">
                 <a:solidFill>
                   <a:srgbClr val="0F172A"/>
                 </a:solidFill>
               </a:defRPr>
             </a:pPr>
             <a:r>
-              <a:t>•   Value for Canteen Vendors: Digitized order queue with 'Rush Mode' throttling, zero-hardware overhead, live stock management, and immediate order throughput gains.</a:t>
+              <a:t>•   For Canteen Vendors: View orders on a live screen, manage rush hours, and avoid order mix-ups.</a:t>
             </a:r>
           </a:p>
           <a:p>
             <a:pPr>
               <a:spcAft>
-                <a:spcPts val="1200"/>
+                <a:spcPts val="1800"/>
               </a:spcAft>
-              <a:defRPr sz="1600">
+              <a:defRPr sz="2000">
                 <a:solidFill>
                   <a:srgbClr val="0F172A"/>
                 </a:solidFill>
               </a:defRPr>
             </a:pPr>
             <a:r>
-              <a:t>•   Value for Campus Administration: Decongests dining halls, enhances safety/hygiene protocols, and modernizes campus digital infrastructure.</a:t>
+              <a:t>•   For College Campus: Reduces crowd congestion in dining areas and promotes a digital campus.</a:t>
             </a:r>
           </a:p>
           <a:p>
             <a:pPr>
               <a:spcAft>
-                <a:spcPts val="1200"/>
+                <a:spcPts val="1800"/>
               </a:spcAft>
-              <a:defRPr sz="1600">
+              <a:defRPr sz="2000">
                 <a:solidFill>
                   <a:srgbClr val="0F172A"/>
                 </a:solidFill>
               </a:defRPr>
             </a:pPr>
             <a:r>
-              <a:t>•   Academic &amp; Research Contribution: Introduces a practical integration of Haversine geofencing with client-side state machine queue orchestration and anti-hoarding penalties.</a:t>
+              <a:t>•   Campus Geofencing: Prevents fake/remote orders by restricting ordering within campus boundaries.</a:t>
             </a:r>
           </a:p>
         </p:txBody>
@@ -7235,7 +6789,7 @@
 </file>
 
 <file path=ppt/slides/slide6.xml><?xml version="1.0" encoding="utf-8"?>
-<p:sld xmlns:a="http://schemas.openxmlformats.org/drawingml/2006/main" xmlns:r="http://schemas.openxmlformats.org/officeDocument/2006/relationships" xmlns:p="http://schemas.openxmlformats.org/presentationml/2006/main">
+<p:sld xmlns:a="http://schemas.openxmlformats.org/drawingml/2006/main" xmlns:p="http://schemas.openxmlformats.org/presentationml/2006/main" xmlns:r="http://schemas.openxmlformats.org/officeDocument/2006/relationships">
   <p:cSld>
     <p:spTree>
       <p:nvGrpSpPr>
@@ -7243,14 +6797,7 @@
         <p:cNvGrpSpPr/>
         <p:nvPr/>
       </p:nvGrpSpPr>
-      <p:grpSpPr>
-        <a:xfrm>
-          <a:off x="0" y="0"/>
-          <a:ext cx="0" cy="0"/>
-          <a:chOff x="0" y="0"/>
-          <a:chExt cx="0" cy="0"/>
-        </a:xfrm>
-      </p:grpSpPr>
+      <p:grpSpPr/>
       <p:sp>
         <p:nvSpPr>
           <p:cNvPr id="2" name="Rectangle 1"/>
@@ -7291,7 +6838,6 @@
           <a:lstStyle/>
           <a:p>
             <a:pPr algn="ctr"/>
-            <a:endParaRPr/>
           </a:p>
         </p:txBody>
       </p:sp>
@@ -7342,7 +6888,7 @@
           <a:lstStyle/>
           <a:p>
             <a:pPr algn="ctr">
-              <a:defRPr sz="3200" b="1">
+              <a:defRPr b="1" sz="3200">
                 <a:solidFill>
                   <a:srgbClr val="0F172A"/>
                 </a:solidFill>
@@ -7433,8 +6979,8 @@
           <p:nvPr/>
         </p:nvGraphicFramePr>
         <p:xfrm>
-          <a:off x="731520" y="1645920"/>
-          <a:ext cx="10728655" cy="4206240"/>
+          <a:off x="914400" y="1828800"/>
+          <a:ext cx="10362895" cy="3931920"/>
         </p:xfrm>
         <a:graphic>
           <a:graphicData uri="http://schemas.openxmlformats.org/drawingml/2006/table">
@@ -7443,50 +6989,25 @@
                 <a:tableStyleId>{5C22544A-7EE6-4342-B048-85BDC9FD1C3A}</a:tableStyleId>
               </a:tblPr>
               <a:tblGrid>
-                <a:gridCol w="2286000">
-                  <a:extLst>
-                    <a:ext uri="{9D8B030D-6E8A-4147-A177-3AD203B41FA5}">
-                      <a16:colId xmlns:a16="http://schemas.microsoft.com/office/drawing/2014/main" val="20000"/>
-                    </a:ext>
-                  </a:extLst>
-                </a:gridCol>
-                <a:gridCol w="2743200">
-                  <a:extLst>
-                    <a:ext uri="{9D8B030D-6E8A-4147-A177-3AD203B41FA5}">
-                      <a16:colId xmlns:a16="http://schemas.microsoft.com/office/drawing/2014/main" val="20001"/>
-                    </a:ext>
-                  </a:extLst>
-                </a:gridCol>
-                <a:gridCol w="2743200">
-                  <a:extLst>
-                    <a:ext uri="{9D8B030D-6E8A-4147-A177-3AD203B41FA5}">
-                      <a16:colId xmlns:a16="http://schemas.microsoft.com/office/drawing/2014/main" val="20002"/>
-                    </a:ext>
-                  </a:extLst>
-                </a:gridCol>
-                <a:gridCol w="2956255">
-                  <a:extLst>
-                    <a:ext uri="{9D8B030D-6E8A-4147-A177-3AD203B41FA5}">
-                      <a16:colId xmlns:a16="http://schemas.microsoft.com/office/drawing/2014/main" val="20003"/>
-                    </a:ext>
-                  </a:extLst>
-                </a:gridCol>
+                <a:gridCol w="2560320"/>
+                <a:gridCol w="3840480"/>
+                <a:gridCol w="3962095"/>
               </a:tblGrid>
-              <a:tr h="1051560">
+              <a:tr h="982980">
                 <a:tc>
                   <a:txBody>
                     <a:bodyPr/>
                     <a:lstStyle/>
                     <a:p>
                       <a:pPr algn="ctr">
-                        <a:defRPr sz="1300" b="1">
+                        <a:defRPr b="1" sz="1400">
                           <a:solidFill>
                             <a:srgbClr val="FFFFFF"/>
                           </a:solidFill>
                         </a:defRPr>
                       </a:pPr>
                       <a:r>
-                        <a:t>Feature / Dimension</a:t>
+                        <a:t>Feature</a:t>
                       </a:r>
                     </a:p>
                   </a:txBody>
@@ -7502,14 +7023,14 @@
                     <a:lstStyle/>
                     <a:p>
                       <a:pPr algn="ctr">
-                        <a:defRPr sz="1300" b="1">
+                        <a:defRPr b="1" sz="1400">
                           <a:solidFill>
                             <a:srgbClr val="FFFFFF"/>
                           </a:solidFill>
                         </a:defRPr>
                       </a:pPr>
                       <a:r>
-                        <a:t>Commercial Apps (Zomato/Swiggy)</a:t>
+                        <a:t>Existing Apps (Zomato / Swiggy / POS)</a:t>
                       </a:r>
                     </a:p>
                   </a:txBody>
@@ -7525,14 +7046,14 @@
                     <a:lstStyle/>
                     <a:p>
                       <a:pPr algn="ctr">
-                        <a:defRPr sz="1300" b="1">
+                        <a:defRPr b="1" sz="1400">
                           <a:solidFill>
                             <a:srgbClr val="FFFFFF"/>
                           </a:solidFill>
                         </a:defRPr>
                       </a:pPr>
                       <a:r>
-                        <a:t>Traditional Campus POS</a:t>
+                        <a:t>Proposed SkipQ System</a:t>
                       </a:r>
                     </a:p>
                   </a:txBody>
@@ -7542,50 +7063,22 @@
                     </a:solidFill>
                   </a:tcPr>
                 </a:tc>
-                <a:tc>
-                  <a:txBody>
-                    <a:bodyPr/>
-                    <a:lstStyle/>
-                    <a:p>
-                      <a:pPr algn="ctr">
-                        <a:defRPr sz="1300" b="1">
-                          <a:solidFill>
-                            <a:srgbClr val="FFFFFF"/>
-                          </a:solidFill>
-                        </a:defRPr>
-                      </a:pPr>
-                      <a:r>
-                        <a:t>Proposed System (SkipQ)</a:t>
-                      </a:r>
-                    </a:p>
-                  </a:txBody>
-                  <a:tcPr>
-                    <a:solidFill>
-                      <a:srgbClr val="8C2323"/>
-                    </a:solidFill>
-                  </a:tcPr>
-                </a:tc>
-                <a:extLst>
-                  <a:ext uri="{0D108BD9-81ED-4DB2-BD59-A6C34878D82A}">
-                    <a16:rowId xmlns:a16="http://schemas.microsoft.com/office/drawing/2014/main" val="10000"/>
-                  </a:ext>
-                </a:extLst>
               </a:tr>
-              <a:tr h="1051560">
+              <a:tr h="982980">
                 <a:tc>
                   <a:txBody>
                     <a:bodyPr/>
                     <a:lstStyle/>
                     <a:p>
                       <a:pPr>
-                        <a:defRPr sz="1200" b="1">
+                        <a:defRPr sz="1300" b="1">
                           <a:solidFill>
                             <a:srgbClr val="0F172A"/>
                           </a:solidFill>
                         </a:defRPr>
                       </a:pPr>
                       <a:r>
-                        <a:t>Geofencing &amp; Campus Focus</a:t>
+                        <a:t>Commission &amp; Cost</a:t>
                       </a:r>
                     </a:p>
                   </a:txBody>
@@ -7601,14 +7094,14 @@
                     <a:lstStyle/>
                     <a:p>
                       <a:pPr>
-                        <a:defRPr sz="1200">
+                        <a:defRPr sz="1300">
                           <a:solidFill>
                             <a:srgbClr val="0F172A"/>
                           </a:solidFill>
                         </a:defRPr>
                       </a:pPr>
                       <a:r>
-                        <a:t>City-wide delivery; no campus micro-boundary restrictions</a:t>
+                        <a:t>High 20–30% vendor cut + extra delivery charges</a:t>
                       </a:r>
                     </a:p>
                   </a:txBody>
@@ -7624,14 +7117,110 @@
                     <a:lstStyle/>
                     <a:p>
                       <a:pPr>
-                        <a:defRPr sz="1200">
+                        <a:defRPr sz="1300">
                           <a:solidFill>
                             <a:srgbClr val="0F172A"/>
                           </a:solidFill>
                         </a:defRPr>
                       </a:pPr>
                       <a:r>
-                        <a:t>On-premise only; physical presence required at billing</a:t>
+                        <a:t>Zero delivery fee, free &amp; campus-focused</a:t>
+                      </a:r>
+                    </a:p>
+                  </a:txBody>
+                  <a:tcPr>
+                    <a:solidFill>
+                      <a:srgbClr val="F1F5F9"/>
+                    </a:solidFill>
+                  </a:tcPr>
+                </a:tc>
+              </a:tr>
+              <a:tr h="982980">
+                <a:tc>
+                  <a:txBody>
+                    <a:bodyPr/>
+                    <a:lstStyle/>
+                    <a:p>
+                      <a:pPr>
+                        <a:defRPr sz="1300" b="1">
+                          <a:solidFill>
+                            <a:srgbClr val="0F172A"/>
+                          </a:solidFill>
+                        </a:defRPr>
+                      </a:pPr>
+                      <a:r>
+                        <a:t>Ordering Area</a:t>
+                      </a:r>
+                    </a:p>
+                  </a:txBody>
+                  <a:tcPr>
+                    <a:solidFill>
+                      <a:srgbClr val="FFFFFF"/>
+                    </a:solidFill>
+                  </a:tcPr>
+                </a:tc>
+                <a:tc>
+                  <a:txBody>
+                    <a:bodyPr/>
+                    <a:lstStyle/>
+                    <a:p>
+                      <a:pPr>
+                        <a:defRPr sz="1300">
+                          <a:solidFill>
+                            <a:srgbClr val="0F172A"/>
+                          </a:solidFill>
+                        </a:defRPr>
+                      </a:pPr>
+                      <a:r>
+                        <a:t>City-wide delivery (no walking campus radius)</a:t>
+                      </a:r>
+                    </a:p>
+                  </a:txBody>
+                  <a:tcPr>
+                    <a:solidFill>
+                      <a:srgbClr val="FFFFFF"/>
+                    </a:solidFill>
+                  </a:tcPr>
+                </a:tc>
+                <a:tc>
+                  <a:txBody>
+                    <a:bodyPr/>
+                    <a:lstStyle/>
+                    <a:p>
+                      <a:pPr>
+                        <a:defRPr sz="1300">
+                          <a:solidFill>
+                            <a:srgbClr val="0F172A"/>
+                          </a:solidFill>
+                        </a:defRPr>
+                      </a:pPr>
+                      <a:r>
+                        <a:t>Campus GPS geofencing (1500m radius limit)</a:t>
+                      </a:r>
+                    </a:p>
+                  </a:txBody>
+                  <a:tcPr>
+                    <a:solidFill>
+                      <a:srgbClr val="FFFFFF"/>
+                    </a:solidFill>
+                  </a:tcPr>
+                </a:tc>
+              </a:tr>
+              <a:tr h="982980">
+                <a:tc>
+                  <a:txBody>
+                    <a:bodyPr/>
+                    <a:lstStyle/>
+                    <a:p>
+                      <a:pPr>
+                        <a:defRPr sz="1300" b="1">
+                          <a:solidFill>
+                            <a:srgbClr val="0F172A"/>
+                          </a:solidFill>
+                        </a:defRPr>
+                      </a:pPr>
+                      <a:r>
+                        <a:t>Pickup &amp; Queue</a:t>
                       </a:r>
                     </a:p>
                   </a:txBody>
@@ -7647,143 +7236,14 @@
                     <a:lstStyle/>
                     <a:p>
                       <a:pPr>
-                        <a:defRPr sz="1200">
+                        <a:defRPr sz="1300">
                           <a:solidFill>
                             <a:srgbClr val="0F172A"/>
                           </a:solidFill>
                         </a:defRPr>
                       </a:pPr>
                       <a:r>
-                        <a:t>Campus boundary geofencing via Haversine calculation</a:t>
-                      </a:r>
-                    </a:p>
-                  </a:txBody>
-                  <a:tcPr>
-                    <a:solidFill>
-                      <a:srgbClr val="F1F5F9"/>
-                    </a:solidFill>
-                  </a:tcPr>
-                </a:tc>
-                <a:extLst>
-                  <a:ext uri="{0D108BD9-81ED-4DB2-BD59-A6C34878D82A}">
-                    <a16:rowId xmlns:a16="http://schemas.microsoft.com/office/drawing/2014/main" val="10001"/>
-                  </a:ext>
-                </a:extLst>
-              </a:tr>
-              <a:tr h="1051560">
-                <a:tc>
-                  <a:txBody>
-                    <a:bodyPr/>
-                    <a:lstStyle/>
-                    <a:p>
-                      <a:pPr>
-                        <a:defRPr sz="1200" b="1">
-                          <a:solidFill>
-                            <a:srgbClr val="0F172A"/>
-                          </a:solidFill>
-                        </a:defRPr>
-                      </a:pPr>
-                      <a:r>
-                        <a:t>Cost &amp; Commission Structure</a:t>
-                      </a:r>
-                    </a:p>
-                  </a:txBody>
-                  <a:tcPr>
-                    <a:solidFill>
-                      <a:srgbClr val="FFFFFF"/>
-                    </a:solidFill>
-                  </a:tcPr>
-                </a:tc>
-                <a:tc>
-                  <a:txBody>
-                    <a:bodyPr/>
-                    <a:lstStyle/>
-                    <a:p>
-                      <a:pPr>
-                        <a:defRPr sz="1200">
-                          <a:solidFill>
-                            <a:srgbClr val="0F172A"/>
-                          </a:solidFill>
-                        </a:defRPr>
-                      </a:pPr>
-                      <a:r>
-                        <a:t>High commission (20-30%) + delivery charges</a:t>
-                      </a:r>
-                    </a:p>
-                  </a:txBody>
-                  <a:tcPr>
-                    <a:solidFill>
-                      <a:srgbClr val="FFFFFF"/>
-                    </a:solidFill>
-                  </a:tcPr>
-                </a:tc>
-                <a:tc>
-                  <a:txBody>
-                    <a:bodyPr/>
-                    <a:lstStyle/>
-                    <a:p>
-                      <a:pPr>
-                        <a:defRPr sz="1200">
-                          <a:solidFill>
-                            <a:srgbClr val="0F172A"/>
-                          </a:solidFill>
-                        </a:defRPr>
-                      </a:pPr>
-                      <a:r>
-                        <a:t>Fixed POS terminal hardware + software AMC licensing</a:t>
-                      </a:r>
-                    </a:p>
-                  </a:txBody>
-                  <a:tcPr>
-                    <a:solidFill>
-                      <a:srgbClr val="FFFFFF"/>
-                    </a:solidFill>
-                  </a:tcPr>
-                </a:tc>
-                <a:tc>
-                  <a:txBody>
-                    <a:bodyPr/>
-                    <a:lstStyle/>
-                    <a:p>
-                      <a:pPr>
-                        <a:defRPr sz="1200">
-                          <a:solidFill>
-                            <a:srgbClr val="0F172A"/>
-                          </a:solidFill>
-                        </a:defRPr>
-                      </a:pPr>
-                      <a:r>
-                        <a:t>Zero delivery commission; runs on accessible mobile devices</a:t>
-                      </a:r>
-                    </a:p>
-                  </a:txBody>
-                  <a:tcPr>
-                    <a:solidFill>
-                      <a:srgbClr val="FFFFFF"/>
-                    </a:solidFill>
-                  </a:tcPr>
-                </a:tc>
-                <a:extLst>
-                  <a:ext uri="{0D108BD9-81ED-4DB2-BD59-A6C34878D82A}">
-                    <a16:rowId xmlns:a16="http://schemas.microsoft.com/office/drawing/2014/main" val="10002"/>
-                  </a:ext>
-                </a:extLst>
-              </a:tr>
-              <a:tr h="1051560">
-                <a:tc>
-                  <a:txBody>
-                    <a:bodyPr/>
-                    <a:lstStyle/>
-                    <a:p>
-                      <a:pPr>
-                        <a:defRPr sz="1200" b="1">
-                          <a:solidFill>
-                            <a:srgbClr val="0F172A"/>
-                          </a:solidFill>
-                        </a:defRPr>
-                      </a:pPr>
-                      <a:r>
-                        <a:t>Queue &amp; Anti-Hoarding Mechanism</a:t>
+                        <a:t>Physical paper tokens or delivery driver pickup</a:t>
                       </a:r>
                     </a:p>
                   </a:txBody>
@@ -7799,14 +7259,14 @@
                     <a:lstStyle/>
                     <a:p>
                       <a:pPr>
-                        <a:defRPr sz="1200">
+                        <a:defRPr sz="1300">
                           <a:solidFill>
                             <a:srgbClr val="0F172A"/>
                           </a:solidFill>
                         </a:defRPr>
                       </a:pPr>
                       <a:r>
-                        <a:t>Delivery boy pickup; no student pickup pass countdown</a:t>
+                        <a:t>Live Digital Pickup Pass with verification code</a:t>
                       </a:r>
                     </a:p>
                   </a:txBody>
@@ -7816,57 +7276,6 @@
                     </a:solidFill>
                   </a:tcPr>
                 </a:tc>
-                <a:tc>
-                  <a:txBody>
-                    <a:bodyPr/>
-                    <a:lstStyle/>
-                    <a:p>
-                      <a:pPr>
-                        <a:defRPr sz="1200">
-                          <a:solidFill>
-                            <a:srgbClr val="0F172A"/>
-                          </a:solidFill>
-                        </a:defRPr>
-                      </a:pPr>
-                      <a:r>
-                        <a:t>Paper token slips prone to misplacement and fraud</a:t>
-                      </a:r>
-                    </a:p>
-                  </a:txBody>
-                  <a:tcPr>
-                    <a:solidFill>
-                      <a:srgbClr val="F1F5F9"/>
-                    </a:solidFill>
-                  </a:tcPr>
-                </a:tc>
-                <a:tc>
-                  <a:txBody>
-                    <a:bodyPr/>
-                    <a:lstStyle/>
-                    <a:p>
-                      <a:pPr>
-                        <a:defRPr sz="1200">
-                          <a:solidFill>
-                            <a:srgbClr val="0F172A"/>
-                          </a:solidFill>
-                        </a:defRPr>
-                      </a:pPr>
-                      <a:r>
-                        <a:t>Dynamic Digital Pickup Pass with verification code &amp; ban policy</a:t>
-                      </a:r>
-                    </a:p>
-                  </a:txBody>
-                  <a:tcPr>
-                    <a:solidFill>
-                      <a:srgbClr val="F1F5F9"/>
-                    </a:solidFill>
-                  </a:tcPr>
-                </a:tc>
-                <a:extLst>
-                  <a:ext uri="{0D108BD9-81ED-4DB2-BD59-A6C34878D82A}">
-                    <a16:rowId xmlns:a16="http://schemas.microsoft.com/office/drawing/2014/main" val="10003"/>
-                  </a:ext>
-                </a:extLst>
               </a:tr>
             </a:tbl>
           </a:graphicData>
@@ -7881,7 +7290,7 @@
 </file>
 
 <file path=ppt/slides/slide7.xml><?xml version="1.0" encoding="utf-8"?>
-<p:sld xmlns:a="http://schemas.openxmlformats.org/drawingml/2006/main" xmlns:r="http://schemas.openxmlformats.org/officeDocument/2006/relationships" xmlns:p="http://schemas.openxmlformats.org/presentationml/2006/main">
+<p:sld xmlns:a="http://schemas.openxmlformats.org/drawingml/2006/main" xmlns:p="http://schemas.openxmlformats.org/presentationml/2006/main" xmlns:r="http://schemas.openxmlformats.org/officeDocument/2006/relationships">
   <p:cSld>
     <p:spTree>
       <p:nvGrpSpPr>
@@ -7889,14 +7298,7 @@
         <p:cNvGrpSpPr/>
         <p:nvPr/>
       </p:nvGrpSpPr>
-      <p:grpSpPr>
-        <a:xfrm>
-          <a:off x="0" y="0"/>
-          <a:ext cx="0" cy="0"/>
-          <a:chOff x="0" y="0"/>
-          <a:chExt cx="0" cy="0"/>
-        </a:xfrm>
-      </p:grpSpPr>
+      <p:grpSpPr/>
       <p:sp>
         <p:nvSpPr>
           <p:cNvPr id="2" name="Rectangle 1"/>
@@ -7937,7 +7339,6 @@
           <a:lstStyle/>
           <a:p>
             <a:pPr algn="ctr"/>
-            <a:endParaRPr/>
           </a:p>
         </p:txBody>
       </p:sp>
@@ -7988,7 +7389,7 @@
           <a:lstStyle/>
           <a:p>
             <a:pPr algn="ctr">
-              <a:defRPr sz="3200" b="1">
+              <a:defRPr b="1" sz="3200">
                 <a:solidFill>
                   <a:srgbClr val="0F172A"/>
                 </a:solidFill>
@@ -8078,8 +7479,8 @@
         </p:nvSpPr>
         <p:spPr>
           <a:xfrm>
-            <a:off x="1097280" y="1645920"/>
-            <a:ext cx="9997135" cy="4389120"/>
+            <a:off x="1371600" y="1828800"/>
+            <a:ext cx="9448495" cy="4114800"/>
           </a:xfrm>
           <a:prstGeom prst="rect">
             <a:avLst/>
@@ -8094,76 +7495,76 @@
           <a:p>
             <a:pPr>
               <a:spcAft>
-                <a:spcPts val="1100"/>
+                <a:spcPts val="1400"/>
               </a:spcAft>
-              <a:defRPr sz="1550">
+              <a:defRPr sz="1850">
                 <a:solidFill>
                   <a:srgbClr val="0F172A"/>
                 </a:solidFill>
               </a:defRPr>
             </a:pPr>
             <a:r>
-              <a:t>•   1. Develop a Unified Dual-Role Application: Seamless toggle between Student Buyer (radar, cart, order) and Canteen Seller (POS ticket queue, inventory management).</a:t>
+              <a:t>•   1. Build Dual Interfaces: Student Radar for quick ordering + Canteen POS for order management.</a:t>
             </a:r>
           </a:p>
           <a:p>
             <a:pPr>
               <a:spcAft>
-                <a:spcPts val="1100"/>
+                <a:spcPts val="1400"/>
               </a:spcAft>
-              <a:defRPr sz="1550">
+              <a:defRPr sz="1850">
                 <a:solidFill>
                   <a:srgbClr val="0F172A"/>
                 </a:solidFill>
               </a:defRPr>
             </a:pPr>
             <a:r>
-              <a:t>•   2. Implement Campus Geofencing: Integrate real-time GPS location validation using the Haversine formula to enforce ordering eligibility within campus coordinates.</a:t>
+              <a:t>•   2. GPS Geofencing: Ensure students can only order when they are present inside the campus.</a:t>
             </a:r>
           </a:p>
           <a:p>
             <a:pPr>
               <a:spcAft>
-                <a:spcPts val="1100"/>
+                <a:spcPts val="1400"/>
               </a:spcAft>
-              <a:defRPr sz="1550">
+              <a:defRPr sz="1850">
                 <a:solidFill>
                   <a:srgbClr val="0F172A"/>
                 </a:solidFill>
               </a:defRPr>
             </a:pPr>
             <a:r>
-              <a:t>•   3. Live Kitchen Ticket Management: Enable real-time multi-stage order tracking (Pending ➔ In-Prep ➔ Ready for Pickup ➔ Completed) with Rush Mode rate-limiting.</a:t>
+              <a:t>•   3. Live Order Tracking: Real-time order stages (Placed ➔ Cooking ➔ Ready for Pickup).</a:t>
             </a:r>
           </a:p>
           <a:p>
             <a:pPr>
               <a:spcAft>
-                <a:spcPts val="1100"/>
+                <a:spcPts val="1400"/>
               </a:spcAft>
-              <a:defRPr sz="1550">
+              <a:defRPr sz="1850">
                 <a:solidFill>
                   <a:srgbClr val="0F172A"/>
                 </a:solidFill>
               </a:defRPr>
             </a:pPr>
             <a:r>
-              <a:t>•   4. Anti-Hoarding &amp; Penalty Protocol: Build an automated penalty mechanism to identify unclaimed orders and temporarily restrict serial defaulters.</a:t>
+              <a:t>•   4. Digital Pickup Pass: Secure token and verification code to guarantee accurate meal handover.</a:t>
             </a:r>
           </a:p>
           <a:p>
             <a:pPr>
               <a:spcAft>
-                <a:spcPts val="1100"/>
+                <a:spcPts val="1400"/>
               </a:spcAft>
-              <a:defRPr sz="1550">
+              <a:defRPr sz="1850">
                 <a:solidFill>
                   <a:srgbClr val="0F172A"/>
                 </a:solidFill>
               </a:defRPr>
             </a:pPr>
             <a:r>
-              <a:t>•   5. High Usability &amp; Offline-First State: Ensure persistent state storage (AsyncStorage) with low latency, snappy navigation, and an intuitive dark-themed UI.</a:t>
+              <a:t>•   5. Fast &amp; Offline-First: Instant response with local data caching and sound alerts.</a:t>
             </a:r>
           </a:p>
         </p:txBody>
@@ -8177,7 +7578,7 @@
 </file>
 
 <file path=ppt/slides/slide8.xml><?xml version="1.0" encoding="utf-8"?>
-<p:sld xmlns:a="http://schemas.openxmlformats.org/drawingml/2006/main" xmlns:r="http://schemas.openxmlformats.org/officeDocument/2006/relationships" xmlns:p="http://schemas.openxmlformats.org/presentationml/2006/main">
+<p:sld xmlns:a="http://schemas.openxmlformats.org/drawingml/2006/main" xmlns:p="http://schemas.openxmlformats.org/presentationml/2006/main" xmlns:r="http://schemas.openxmlformats.org/officeDocument/2006/relationships">
   <p:cSld>
     <p:spTree>
       <p:nvGrpSpPr>
@@ -8185,14 +7586,7 @@
         <p:cNvGrpSpPr/>
         <p:nvPr/>
       </p:nvGrpSpPr>
-      <p:grpSpPr>
-        <a:xfrm>
-          <a:off x="0" y="0"/>
-          <a:ext cx="0" cy="0"/>
-          <a:chOff x="0" y="0"/>
-          <a:chExt cx="0" cy="0"/>
-        </a:xfrm>
-      </p:grpSpPr>
+      <p:grpSpPr/>
       <p:sp>
         <p:nvSpPr>
           <p:cNvPr id="2" name="Rectangle 1"/>
@@ -8233,7 +7627,6 @@
           <a:lstStyle/>
           <a:p>
             <a:pPr algn="ctr"/>
-            <a:endParaRPr/>
           </a:p>
         </p:txBody>
       </p:sp>
@@ -8284,7 +7677,7 @@
           <a:lstStyle/>
           <a:p>
             <a:pPr algn="ctr">
-              <a:defRPr sz="3200" b="1">
+              <a:defRPr b="1" sz="3200">
                 <a:solidFill>
                   <a:srgbClr val="0F172A"/>
                 </a:solidFill>
@@ -8398,8 +7791,8 @@
         </p:nvSpPr>
         <p:spPr>
           <a:xfrm>
-            <a:off x="7132320" y="1371600"/>
-            <a:ext cx="4389120" cy="4572000"/>
+            <a:off x="7132320" y="1645920"/>
+            <a:ext cx="4389120" cy="4389120"/>
           </a:xfrm>
           <a:prstGeom prst="rect">
             <a:avLst/>
@@ -8414,181 +7807,166 @@
           <a:p>
             <a:pPr>
               <a:spcAft>
-                <a:spcPts val="600"/>
+                <a:spcPts val="1000"/>
               </a:spcAft>
-              <a:defRPr sz="1500" b="1">
+              <a:defRPr b="1" sz="1800">
                 <a:solidFill>
                   <a:srgbClr val="8C2323"/>
                 </a:solidFill>
               </a:defRPr>
             </a:pPr>
             <a:r>
-              <a:t>Actors &amp; Functional Boundaries:</a:t>
+              <a:t>Key Roles &amp; Actions:</a:t>
             </a:r>
           </a:p>
           <a:p>
             <a:pPr>
               <a:spcAft>
-                <a:spcPts val="200"/>
+                <a:spcPts val="400"/>
               </a:spcAft>
-              <a:defRPr sz="1150">
+              <a:defRPr sz="1400">
                 <a:solidFill>
                   <a:srgbClr val="0F172A"/>
                 </a:solidFill>
               </a:defRPr>
             </a:pPr>
             <a:r>
-              <a:t>• Student Actor (Buyer):</a:t>
+              <a:t>• Student Actor:</a:t>
             </a:r>
           </a:p>
           <a:p>
             <a:pPr>
               <a:spcAft>
-                <a:spcPts val="200"/>
+                <a:spcPts val="400"/>
               </a:spcAft>
-              <a:defRPr sz="1150">
+              <a:defRPr sz="1400">
                 <a:solidFill>
                   <a:srgbClr val="0F172A"/>
                 </a:solidFill>
               </a:defRPr>
             </a:pPr>
             <a:r>
-              <a:t>  • Select University Campus &amp; view Radar</a:t>
+              <a:t>  • Browse canteen menus &amp; diet tags</a:t>
             </a:r>
           </a:p>
           <a:p>
             <a:pPr>
               <a:spcAft>
-                <a:spcPts val="200"/>
+                <a:spcPts val="400"/>
               </a:spcAft>
-              <a:defRPr sz="1150">
+              <a:defRPr sz="1400">
                 <a:solidFill>
                   <a:srgbClr val="0F172A"/>
                 </a:solidFill>
               </a:defRPr>
             </a:pPr>
             <a:r>
-              <a:t>  • Filter Menu (Veg/Vegan/Spicy)</a:t>
+              <a:t>  • Add food to cart &amp; place order</a:t>
             </a:r>
           </a:p>
           <a:p>
             <a:pPr>
               <a:spcAft>
-                <a:spcPts val="200"/>
+                <a:spcPts val="400"/>
               </a:spcAft>
-              <a:defRPr sz="1150">
+              <a:defRPr sz="1400">
                 <a:solidFill>
                   <a:srgbClr val="0F172A"/>
                 </a:solidFill>
               </a:defRPr>
             </a:pPr>
             <a:r>
-              <a:t>  • Add to Cart &amp; Checkout</a:t>
+              <a:t>  • Show Digital Pass at counter</a:t>
             </a:r>
           </a:p>
           <a:p>
             <a:pPr>
               <a:spcAft>
-                <a:spcPts val="200"/>
+                <a:spcPts val="400"/>
               </a:spcAft>
-              <a:defRPr sz="1150">
+              <a:defRPr sz="1400">
                 <a:solidFill>
                   <a:srgbClr val="0F172A"/>
                 </a:solidFill>
               </a:defRPr>
             </a:pPr>
             <a:r>
-              <a:t>  • View Live Dynamic Pickup Pass</a:t>
+              <a:t>• Canteen Operator:</a:t>
             </a:r>
           </a:p>
           <a:p>
             <a:pPr>
               <a:spcAft>
-                <a:spcPts val="200"/>
+                <a:spcPts val="400"/>
               </a:spcAft>
-              <a:defRPr sz="1150">
+              <a:defRPr sz="1400">
                 <a:solidFill>
                   <a:srgbClr val="0F172A"/>
                 </a:solidFill>
               </a:defRPr>
             </a:pPr>
             <a:r>
-              <a:t>• GPS Geofence Service:</a:t>
+              <a:t>  • Receive tickets on POS queue</a:t>
             </a:r>
           </a:p>
           <a:p>
             <a:pPr>
               <a:spcAft>
-                <a:spcPts val="200"/>
+                <a:spcPts val="400"/>
               </a:spcAft>
-              <a:defRPr sz="1150">
+              <a:defRPr sz="1400">
                 <a:solidFill>
                   <a:srgbClr val="0F172A"/>
                 </a:solidFill>
               </a:defRPr>
             </a:pPr>
             <a:r>
-              <a:t>  • Automatically validates campus radius before payment &lt;&lt;include&gt;&gt;</a:t>
+              <a:t>  • Update food cooking status</a:t>
             </a:r>
           </a:p>
           <a:p>
             <a:pPr>
               <a:spcAft>
-                <a:spcPts val="200"/>
+                <a:spcPts val="400"/>
               </a:spcAft>
-              <a:defRPr sz="1150">
+              <a:defRPr sz="1400">
                 <a:solidFill>
                   <a:srgbClr val="0F172A"/>
                 </a:solidFill>
               </a:defRPr>
             </a:pPr>
             <a:r>
-              <a:t>• Canteen Operator (POS Seller):</a:t>
+              <a:t>  • Verify pass code &amp; deliver meal</a:t>
             </a:r>
           </a:p>
           <a:p>
             <a:pPr>
               <a:spcAft>
-                <a:spcPts val="200"/>
+                <a:spcPts val="400"/>
               </a:spcAft>
-              <a:defRPr sz="1150">
+              <a:defRPr sz="1400">
                 <a:solidFill>
                   <a:srgbClr val="0F172A"/>
                 </a:solidFill>
               </a:defRPr>
             </a:pPr>
             <a:r>
-              <a:t>  • Manage ticket pipeline (Pending ➔ Prep ➔ Ready)</a:t>
+              <a:t>• GPS Service:</a:t>
             </a:r>
           </a:p>
           <a:p>
             <a:pPr>
               <a:spcAft>
-                <a:spcPts val="200"/>
+                <a:spcPts val="400"/>
               </a:spcAft>
-              <a:defRPr sz="1150">
+              <a:defRPr sz="1400">
                 <a:solidFill>
                   <a:srgbClr val="0F172A"/>
                 </a:solidFill>
               </a:defRPr>
             </a:pPr>
             <a:r>
-              <a:t>  • Toggle Rush Mode &amp; modify out-of-stock items</a:t>
-            </a:r>
-          </a:p>
-          <a:p>
-            <a:pPr>
-              <a:spcAft>
-                <a:spcPts val="200"/>
-              </a:spcAft>
-              <a:defRPr sz="1150">
-                <a:solidFill>
-                  <a:srgbClr val="0F172A"/>
-                </a:solidFill>
-              </a:defRPr>
-            </a:pPr>
-            <a:r>
-              <a:t>  • Verify pass code &amp; finalize order</a:t>
+              <a:t>  • Validates student is on campus</a:t>
             </a:r>
           </a:p>
         </p:txBody>
@@ -8602,7 +7980,7 @@
 </file>
 
 <file path=ppt/slides/slide9.xml><?xml version="1.0" encoding="utf-8"?>
-<p:sld xmlns:a="http://schemas.openxmlformats.org/drawingml/2006/main" xmlns:r="http://schemas.openxmlformats.org/officeDocument/2006/relationships" xmlns:p="http://schemas.openxmlformats.org/presentationml/2006/main">
+<p:sld xmlns:a="http://schemas.openxmlformats.org/drawingml/2006/main" xmlns:p="http://schemas.openxmlformats.org/presentationml/2006/main" xmlns:r="http://schemas.openxmlformats.org/officeDocument/2006/relationships">
   <p:cSld>
     <p:spTree>
       <p:nvGrpSpPr>
@@ -8610,14 +7988,7 @@
         <p:cNvGrpSpPr/>
         <p:nvPr/>
       </p:nvGrpSpPr>
-      <p:grpSpPr>
-        <a:xfrm>
-          <a:off x="0" y="0"/>
-          <a:ext cx="0" cy="0"/>
-          <a:chOff x="0" y="0"/>
-          <a:chExt cx="0" cy="0"/>
-        </a:xfrm>
-      </p:grpSpPr>
+      <p:grpSpPr/>
       <p:sp>
         <p:nvSpPr>
           <p:cNvPr id="2" name="Rectangle 1"/>
@@ -8658,7 +8029,6 @@
           <a:lstStyle/>
           <a:p>
             <a:pPr algn="ctr"/>
-            <a:endParaRPr/>
           </a:p>
         </p:txBody>
       </p:sp>
@@ -8709,7 +8079,7 @@
           <a:lstStyle/>
           <a:p>
             <a:pPr algn="ctr">
-              <a:defRPr sz="3200" b="1">
+              <a:defRPr b="1" sz="3200">
                 <a:solidFill>
                   <a:srgbClr val="0F172A"/>
                 </a:solidFill>
@@ -8823,8 +8193,8 @@
         </p:nvSpPr>
         <p:spPr>
           <a:xfrm>
-            <a:off x="7132320" y="1371600"/>
-            <a:ext cx="4389120" cy="4572000"/>
+            <a:off x="7132320" y="1645920"/>
+            <a:ext cx="4389120" cy="4389120"/>
           </a:xfrm>
           <a:prstGeom prst="rect">
             <a:avLst/>
@@ -8839,24 +8209,24 @@
           <a:p>
             <a:pPr>
               <a:spcAft>
-                <a:spcPts val="600"/>
+                <a:spcPts val="1000"/>
               </a:spcAft>
-              <a:defRPr sz="1500" b="1">
+              <a:defRPr b="1" sz="1800">
                 <a:solidFill>
                   <a:srgbClr val="8C2323"/>
                 </a:solidFill>
               </a:defRPr>
             </a:pPr>
             <a:r>
-              <a:t>Core Data Entities &amp; Logic:</a:t>
+              <a:t>Core Data Classes:</a:t>
             </a:r>
           </a:p>
           <a:p>
             <a:pPr>
               <a:spcAft>
-                <a:spcPts val="200"/>
+                <a:spcPts val="400"/>
               </a:spcAft>
-              <a:defRPr sz="1150">
+              <a:defRPr sz="1400">
                 <a:solidFill>
                   <a:srgbClr val="0F172A"/>
                 </a:solidFill>
@@ -8869,151 +8239,136 @@
           <a:p>
             <a:pPr>
               <a:spcAft>
-                <a:spcPts val="200"/>
+                <a:spcPts val="400"/>
               </a:spcAft>
-              <a:defRPr sz="1150">
+              <a:defRPr sz="1400">
                 <a:solidFill>
                   <a:srgbClr val="0F172A"/>
                 </a:solidFill>
               </a:defRPr>
             </a:pPr>
             <a:r>
-              <a:t>  • Holds shop metadata, rush status &amp; rating</a:t>
+              <a:t>  • Name, location, rating, menu items</a:t>
             </a:r>
           </a:p>
           <a:p>
             <a:pPr>
               <a:spcAft>
-                <a:spcPts val="200"/>
+                <a:spcPts val="400"/>
               </a:spcAft>
-              <a:defRPr sz="1150">
+              <a:defRPr sz="1400">
                 <a:solidFill>
                   <a:srgbClr val="0F172A"/>
                 </a:solidFill>
               </a:defRPr>
             </a:pPr>
             <a:r>
-              <a:t>  • 1-to-many relationship with MenuItem</a:t>
+              <a:t>• MenuItem Class:</a:t>
             </a:r>
           </a:p>
           <a:p>
             <a:pPr>
               <a:spcAft>
-                <a:spcPts val="200"/>
+                <a:spcPts val="400"/>
               </a:spcAft>
-              <a:defRPr sz="1150">
+              <a:defRPr sz="1400">
                 <a:solidFill>
                   <a:srgbClr val="0F172A"/>
                 </a:solidFill>
               </a:defRPr>
             </a:pPr>
             <a:r>
-              <a:t>• MenuItem Class:</a:t>
+              <a:t>  • Title, price, prep time, veg tag</a:t>
             </a:r>
           </a:p>
           <a:p>
             <a:pPr>
               <a:spcAft>
-                <a:spcPts val="200"/>
+                <a:spcPts val="400"/>
               </a:spcAft>
-              <a:defRPr sz="1150">
+              <a:defRPr sz="1400">
                 <a:solidFill>
                   <a:srgbClr val="0F172A"/>
                 </a:solidFill>
               </a:defRPr>
             </a:pPr>
             <a:r>
-              <a:t>  • Stores pricing, preparation time &amp; dietary flags</a:t>
+              <a:t>• Order Class:</a:t>
             </a:r>
           </a:p>
           <a:p>
             <a:pPr>
               <a:spcAft>
-                <a:spcPts val="200"/>
+                <a:spcPts val="400"/>
               </a:spcAft>
-              <a:defRPr sz="1150">
+              <a:defRPr sz="1400">
                 <a:solidFill>
                   <a:srgbClr val="0F172A"/>
                 </a:solidFill>
               </a:defRPr>
             </a:pPr>
             <a:r>
-              <a:t>• Order &amp; CartItem Entities:</a:t>
+              <a:t>  • Token number, status, verification code</a:t>
             </a:r>
           </a:p>
           <a:p>
             <a:pPr>
               <a:spcAft>
-                <a:spcPts val="200"/>
+                <a:spcPts val="400"/>
               </a:spcAft>
-              <a:defRPr sz="1150">
+              <a:defRPr sz="1400">
                 <a:solidFill>
                   <a:srgbClr val="0F172A"/>
                 </a:solidFill>
               </a:defRPr>
             </a:pPr>
             <a:r>
-              <a:t>  • Encapsulates order state transitions &amp; token ID</a:t>
+              <a:t>• UserProfile Class:</a:t>
             </a:r>
           </a:p>
           <a:p>
             <a:pPr>
               <a:spcAft>
-                <a:spcPts val="200"/>
+                <a:spcPts val="400"/>
               </a:spcAft>
-              <a:defRPr sz="1150">
+              <a:defRPr sz="1400">
                 <a:solidFill>
                   <a:srgbClr val="0F172A"/>
                 </a:solidFill>
               </a:defRPr>
             </a:pPr>
             <a:r>
-              <a:t>• UserProfile Class:</a:t>
+              <a:t>  • Student name, roll number, wallet</a:t>
             </a:r>
           </a:p>
           <a:p>
             <a:pPr>
               <a:spcAft>
-                <a:spcPts val="200"/>
+                <a:spcPts val="400"/>
               </a:spcAft>
-              <a:defRPr sz="1150">
+              <a:defRPr sz="1400">
                 <a:solidFill>
                   <a:srgbClr val="0F172A"/>
                 </a:solidFill>
               </a:defRPr>
             </a:pPr>
             <a:r>
-              <a:t>  • Tracks student wallet &amp; penalty counter</a:t>
+              <a:t>• GeoLocationEngine:</a:t>
             </a:r>
           </a:p>
           <a:p>
             <a:pPr>
               <a:spcAft>
-                <a:spcPts val="200"/>
+                <a:spcPts val="400"/>
               </a:spcAft>
-              <a:defRPr sz="1150">
+              <a:defRPr sz="1400">
                 <a:solidFill>
                   <a:srgbClr val="0F172A"/>
                 </a:solidFill>
               </a:defRPr>
             </a:pPr>
             <a:r>
-              <a:t>• GeoLocationEngine Utility:</a:t>
-            </a:r>
-          </a:p>
-          <a:p>
-            <a:pPr>
-              <a:spcAft>
-                <a:spcPts val="200"/>
-              </a:spcAft>
-              <a:defRPr sz="1150">
-                <a:solidFill>
-                  <a:srgbClr val="0F172A"/>
-                </a:solidFill>
-              </a:defRPr>
-            </a:pPr>
-            <a:r>
-              <a:t>  • Haversine formula calculation for campus bounding</a:t>
+              <a:t>  • Distance check (Haversine formula)</a:t>
             </a:r>
           </a:p>
         </p:txBody>
